--- a/output_pptx/Our_God.pptx
+++ b/output_pptx/Our_God.pptx
@@ -3125,8 +3125,8 @@
         </p:nvSpPr>
         <p:spPr>
           <a:xfrm>
-            <a:off x="594360" y="1837944"/>
-            <a:ext cx="11002975" cy="685800"/>
+            <a:off x="640080" y="1650492"/>
+            <a:ext cx="10911535" cy="731520"/>
           </a:xfrm>
           <a:prstGeom prst="rect">
             <a:avLst/>
@@ -3141,7 +3141,7 @@
           <a:p>
             <a:pPr algn="ctr"/>
             <a:r>
-              <a:rPr sz="4400" b="1" i="0">
+              <a:rPr sz="4800" b="1" i="0">
                 <a:solidFill>
                   <a:srgbClr val="FFFFFF"/>
                 </a:solidFill>
@@ -3160,8 +3160,8 @@
         </p:nvSpPr>
         <p:spPr>
           <a:xfrm>
-            <a:off x="594360" y="2560320"/>
-            <a:ext cx="11002975" cy="384048"/>
+            <a:off x="640080" y="2418588"/>
+            <a:ext cx="10911535" cy="365760"/>
           </a:xfrm>
           <a:prstGeom prst="rect">
             <a:avLst/>
@@ -3178,7 +3178,7 @@
             <a:r>
               <a:rPr sz="2400" b="0" i="1">
                 <a:solidFill>
-                  <a:srgbClr val="B4B4B4"/>
+                  <a:srgbClr val="AAAAAA"/>
                 </a:solidFill>
                 <a:latin typeface="Arial"/>
               </a:rPr>
@@ -3195,8 +3195,8 @@
         </p:nvSpPr>
         <p:spPr>
           <a:xfrm>
-            <a:off x="594360" y="2980944"/>
-            <a:ext cx="11002975" cy="347472"/>
+            <a:off x="640080" y="2985516"/>
+            <a:ext cx="10911535" cy="731520"/>
           </a:xfrm>
           <a:prstGeom prst="rect">
             <a:avLst/>
@@ -3211,13 +3211,13 @@
           <a:p>
             <a:pPr algn="ctr"/>
             <a:r>
-              <a:rPr sz="2000" b="0" i="1">
-                <a:solidFill>
-                  <a:srgbClr val="8C8C8C"/>
+              <a:rPr sz="4800" b="1" i="0">
+                <a:solidFill>
+                  <a:srgbClr val="FFFFFF"/>
                 </a:solidFill>
                 <a:latin typeface="Arial"/>
               </a:rPr>
-              <a:t/>
+              <a:t>ならぶもの      いない</a:t>
             </a:r>
           </a:p>
         </p:txBody>
@@ -3230,8 +3230,8 @@
         </p:nvSpPr>
         <p:spPr>
           <a:xfrm>
-            <a:off x="594360" y="3529584"/>
-            <a:ext cx="11002975" cy="685800"/>
+            <a:off x="640080" y="3753612"/>
+            <a:ext cx="10911535" cy="365760"/>
           </a:xfrm>
           <a:prstGeom prst="rect">
             <a:avLst/>
@@ -3246,83 +3246,13 @@
           <a:p>
             <a:pPr algn="ctr"/>
             <a:r>
-              <a:rPr sz="4400" b="1" i="0">
-                <a:solidFill>
-                  <a:srgbClr val="FFFFFF"/>
-                </a:solidFill>
-                <a:latin typeface="Arial"/>
-              </a:rPr>
-              <a:t>ならぶもの      いない</a:t>
-            </a:r>
-          </a:p>
-        </p:txBody>
-      </p:sp>
-      <p:sp>
-        <p:nvSpPr>
-          <p:cNvPr id="6" name="TextBox 5"/>
-          <p:cNvSpPr txBox="1"/>
-          <p:nvPr/>
-        </p:nvSpPr>
-        <p:spPr>
-          <a:xfrm>
-            <a:off x="594360" y="4251960"/>
-            <a:ext cx="11002975" cy="384048"/>
-          </a:xfrm>
-          <a:prstGeom prst="rect">
-            <a:avLst/>
-          </a:prstGeom>
-          <a:noFill/>
-        </p:spPr>
-        <p:txBody>
-          <a:bodyPr wrap="square">
-            <a:spAutoFit/>
-          </a:bodyPr>
-          <a:lstStyle/>
-          <a:p>
-            <a:pPr algn="ctr"/>
-            <a:r>
               <a:rPr sz="2400" b="0" i="1">
                 <a:solidFill>
-                  <a:srgbClr val="B4B4B4"/>
+                  <a:srgbClr val="AAAAAA"/>
                 </a:solidFill>
                 <a:latin typeface="Arial"/>
               </a:rPr>
               <a:t>narabu mono   inai</a:t>
-            </a:r>
-          </a:p>
-        </p:txBody>
-      </p:sp>
-      <p:sp>
-        <p:nvSpPr>
-          <p:cNvPr id="7" name="TextBox 6"/>
-          <p:cNvSpPr txBox="1"/>
-          <p:nvPr/>
-        </p:nvSpPr>
-        <p:spPr>
-          <a:xfrm>
-            <a:off x="594360" y="4672584"/>
-            <a:ext cx="11002975" cy="347472"/>
-          </a:xfrm>
-          <a:prstGeom prst="rect">
-            <a:avLst/>
-          </a:prstGeom>
-          <a:noFill/>
-        </p:spPr>
-        <p:txBody>
-          <a:bodyPr wrap="square">
-            <a:spAutoFit/>
-          </a:bodyPr>
-          <a:lstStyle/>
-          <a:p>
-            <a:pPr algn="ctr"/>
-            <a:r>
-              <a:rPr sz="2000" b="0" i="1">
-                <a:solidFill>
-                  <a:srgbClr val="8C8C8C"/>
-                </a:solidFill>
-                <a:latin typeface="Arial"/>
-              </a:rPr>
-              <a:t/>
             </a:r>
           </a:p>
         </p:txBody>
@@ -3361,8 +3291,8 @@
         </p:nvSpPr>
         <p:spPr>
           <a:xfrm>
-            <a:off x="594360" y="2258568"/>
-            <a:ext cx="11002975" cy="685800"/>
+            <a:off x="640080" y="2052828"/>
+            <a:ext cx="10911535" cy="731520"/>
           </a:xfrm>
           <a:prstGeom prst="rect">
             <a:avLst/>
@@ -3377,7 +3307,7 @@
           <a:p>
             <a:pPr algn="ctr"/>
             <a:r>
-              <a:rPr sz="4400" b="1" i="0">
+              <a:rPr sz="4800" b="1" i="0">
                 <a:solidFill>
                   <a:srgbClr val="FFFFFF"/>
                 </a:solidFill>
@@ -3396,8 +3326,8 @@
         </p:nvSpPr>
         <p:spPr>
           <a:xfrm>
-            <a:off x="594360" y="2980944"/>
-            <a:ext cx="11002975" cy="347472"/>
+            <a:off x="640080" y="2985516"/>
+            <a:ext cx="10911535" cy="731520"/>
           </a:xfrm>
           <a:prstGeom prst="rect">
             <a:avLst/>
@@ -3412,83 +3342,13 @@
           <a:p>
             <a:pPr algn="ctr"/>
             <a:r>
-              <a:rPr sz="2200" b="0" i="1">
-                <a:solidFill>
-                  <a:srgbClr val="8C8C8C"/>
-                </a:solidFill>
-                <a:latin typeface="Arial"/>
-              </a:rPr>
-              <a:t/>
-            </a:r>
-          </a:p>
-        </p:txBody>
-      </p:sp>
-      <p:sp>
-        <p:nvSpPr>
-          <p:cNvPr id="4" name="TextBox 3"/>
-          <p:cNvSpPr txBox="1"/>
-          <p:nvPr/>
-        </p:nvSpPr>
-        <p:spPr>
-          <a:xfrm>
-            <a:off x="594360" y="3529584"/>
-            <a:ext cx="11002975" cy="685800"/>
-          </a:xfrm>
-          <a:prstGeom prst="rect">
-            <a:avLst/>
-          </a:prstGeom>
-          <a:noFill/>
-        </p:spPr>
-        <p:txBody>
-          <a:bodyPr wrap="square">
-            <a:spAutoFit/>
-          </a:bodyPr>
-          <a:lstStyle/>
-          <a:p>
-            <a:pPr algn="ctr"/>
-            <a:r>
-              <a:rPr sz="4400" b="1" i="0">
+              <a:rPr sz="4800" b="1" i="0">
                 <a:solidFill>
                   <a:srgbClr val="FFFFFF"/>
                 </a:solidFill>
                 <a:latin typeface="Arial"/>
               </a:rPr>
               <a:t>Dentro da noite brilhou</a:t>
-            </a:r>
-          </a:p>
-        </p:txBody>
-      </p:sp>
-      <p:sp>
-        <p:nvSpPr>
-          <p:cNvPr id="5" name="TextBox 4"/>
-          <p:cNvSpPr txBox="1"/>
-          <p:nvPr/>
-        </p:nvSpPr>
-        <p:spPr>
-          <a:xfrm>
-            <a:off x="594360" y="4251960"/>
-            <a:ext cx="11002975" cy="347472"/>
-          </a:xfrm>
-          <a:prstGeom prst="rect">
-            <a:avLst/>
-          </a:prstGeom>
-          <a:noFill/>
-        </p:spPr>
-        <p:txBody>
-          <a:bodyPr wrap="square">
-            <a:spAutoFit/>
-          </a:bodyPr>
-          <a:lstStyle/>
-          <a:p>
-            <a:pPr algn="ctr"/>
-            <a:r>
-              <a:rPr sz="2200" b="0" i="1">
-                <a:solidFill>
-                  <a:srgbClr val="8C8C8C"/>
-                </a:solidFill>
-                <a:latin typeface="Arial"/>
-              </a:rPr>
-              <a:t/>
             </a:r>
           </a:p>
         </p:txBody>
@@ -3527,8 +3387,8 @@
         </p:nvSpPr>
         <p:spPr>
           <a:xfrm>
-            <a:off x="594360" y="2258568"/>
-            <a:ext cx="11002975" cy="685800"/>
+            <a:off x="640080" y="2052828"/>
+            <a:ext cx="10911535" cy="731520"/>
           </a:xfrm>
           <a:prstGeom prst="rect">
             <a:avLst/>
@@ -3543,7 +3403,7 @@
           <a:p>
             <a:pPr algn="ctr"/>
             <a:r>
-              <a:rPr sz="4400" b="1" i="0">
+              <a:rPr sz="4800" b="1" i="0">
                 <a:solidFill>
                   <a:srgbClr val="FFFFFF"/>
                 </a:solidFill>
@@ -3562,8 +3422,8 @@
         </p:nvSpPr>
         <p:spPr>
           <a:xfrm>
-            <a:off x="594360" y="2980944"/>
-            <a:ext cx="11002975" cy="347472"/>
+            <a:off x="640080" y="2985516"/>
+            <a:ext cx="10911535" cy="731520"/>
           </a:xfrm>
           <a:prstGeom prst="rect">
             <a:avLst/>
@@ -3578,83 +3438,13 @@
           <a:p>
             <a:pPr algn="ctr"/>
             <a:r>
-              <a:rPr sz="2200" b="0" i="1">
-                <a:solidFill>
-                  <a:srgbClr val="8C8C8C"/>
-                </a:solidFill>
-                <a:latin typeface="Arial"/>
-              </a:rPr>
-              <a:t/>
-            </a:r>
-          </a:p>
-        </p:txBody>
-      </p:sp>
-      <p:sp>
-        <p:nvSpPr>
-          <p:cNvPr id="4" name="TextBox 3"/>
-          <p:cNvSpPr txBox="1"/>
-          <p:nvPr/>
-        </p:nvSpPr>
-        <p:spPr>
-          <a:xfrm>
-            <a:off x="594360" y="3529584"/>
-            <a:ext cx="11002975" cy="685800"/>
-          </a:xfrm>
-          <a:prstGeom prst="rect">
-            <a:avLst/>
-          </a:prstGeom>
-          <a:noFill/>
-        </p:spPr>
-        <p:txBody>
-          <a:bodyPr wrap="square">
-            <a:spAutoFit/>
-          </a:bodyPr>
-          <a:lstStyle/>
-          <a:p>
-            <a:pPr algn="ctr"/>
-            <a:r>
-              <a:rPr sz="4400" b="1" i="0">
+              <a:rPr sz="4800" b="1" i="0">
                 <a:solidFill>
                   <a:srgbClr val="FFFFFF"/>
                 </a:solidFill>
                 <a:latin typeface="Arial"/>
               </a:rPr>
               <a:t>Não há outro igual</a:t>
-            </a:r>
-          </a:p>
-        </p:txBody>
-      </p:sp>
-      <p:sp>
-        <p:nvSpPr>
-          <p:cNvPr id="5" name="TextBox 4"/>
-          <p:cNvSpPr txBox="1"/>
-          <p:nvPr/>
-        </p:nvSpPr>
-        <p:spPr>
-          <a:xfrm>
-            <a:off x="594360" y="4251960"/>
-            <a:ext cx="11002975" cy="347472"/>
-          </a:xfrm>
-          <a:prstGeom prst="rect">
-            <a:avLst/>
-          </a:prstGeom>
-          <a:noFill/>
-        </p:spPr>
-        <p:txBody>
-          <a:bodyPr wrap="square">
-            <a:spAutoFit/>
-          </a:bodyPr>
-          <a:lstStyle/>
-          <a:p>
-            <a:pPr algn="ctr"/>
-            <a:r>
-              <a:rPr sz="2200" b="0" i="1">
-                <a:solidFill>
-                  <a:srgbClr val="8C8C8C"/>
-                </a:solidFill>
-                <a:latin typeface="Arial"/>
-              </a:rPr>
-              <a:t/>
             </a:r>
           </a:p>
         </p:txBody>
@@ -3693,8 +3483,8 @@
         </p:nvSpPr>
         <p:spPr>
           <a:xfrm>
-            <a:off x="594360" y="2258568"/>
-            <a:ext cx="11002975" cy="685800"/>
+            <a:off x="640080" y="2052828"/>
+            <a:ext cx="10911535" cy="731520"/>
           </a:xfrm>
           <a:prstGeom prst="rect">
             <a:avLst/>
@@ -3709,7 +3499,7 @@
           <a:p>
             <a:pPr algn="ctr"/>
             <a:r>
-              <a:rPr sz="3434" b="1" i="0">
+              <a:rPr sz="3700" b="1" i="0">
                 <a:solidFill>
                   <a:srgbClr val="FFFFFF"/>
                 </a:solidFill>
@@ -3728,8 +3518,8 @@
         </p:nvSpPr>
         <p:spPr>
           <a:xfrm>
-            <a:off x="594360" y="2980944"/>
-            <a:ext cx="11002975" cy="347472"/>
+            <a:off x="640080" y="2985516"/>
+            <a:ext cx="10911535" cy="731520"/>
           </a:xfrm>
           <a:prstGeom prst="rect">
             <a:avLst/>
@@ -3744,83 +3534,13 @@
           <a:p>
             <a:pPr algn="ctr"/>
             <a:r>
-              <a:rPr sz="2200" b="0" i="1">
-                <a:solidFill>
-                  <a:srgbClr val="8C8C8C"/>
-                </a:solidFill>
-                <a:latin typeface="Arial"/>
-              </a:rPr>
-              <a:t/>
-            </a:r>
-          </a:p>
-        </p:txBody>
-      </p:sp>
-      <p:sp>
-        <p:nvSpPr>
-          <p:cNvPr id="4" name="TextBox 3"/>
-          <p:cNvSpPr txBox="1"/>
-          <p:nvPr/>
-        </p:nvSpPr>
-        <p:spPr>
-          <a:xfrm>
-            <a:off x="594360" y="3529584"/>
-            <a:ext cx="11002975" cy="685800"/>
-          </a:xfrm>
-          <a:prstGeom prst="rect">
-            <a:avLst/>
-          </a:prstGeom>
-          <a:noFill/>
-        </p:spPr>
-        <p:txBody>
-          <a:bodyPr wrap="square">
-            <a:spAutoFit/>
-          </a:bodyPr>
-          <a:lstStyle/>
-          <a:p>
-            <a:pPr algn="ctr"/>
-            <a:r>
-              <a:rPr sz="4400" b="1" i="0">
+              <a:rPr sz="4800" b="1" i="0">
                 <a:solidFill>
                   <a:srgbClr val="FFFFFF"/>
                 </a:solidFill>
                 <a:latin typeface="Arial"/>
               </a:rPr>
               <a:t>Nosso Deus é curador</a:t>
-            </a:r>
-          </a:p>
-        </p:txBody>
-      </p:sp>
-      <p:sp>
-        <p:nvSpPr>
-          <p:cNvPr id="5" name="TextBox 4"/>
-          <p:cNvSpPr txBox="1"/>
-          <p:nvPr/>
-        </p:nvSpPr>
-        <p:spPr>
-          <a:xfrm>
-            <a:off x="594360" y="4251960"/>
-            <a:ext cx="11002975" cy="347472"/>
-          </a:xfrm>
-          <a:prstGeom prst="rect">
-            <a:avLst/>
-          </a:prstGeom>
-          <a:noFill/>
-        </p:spPr>
-        <p:txBody>
-          <a:bodyPr wrap="square">
-            <a:spAutoFit/>
-          </a:bodyPr>
-          <a:lstStyle/>
-          <a:p>
-            <a:pPr algn="ctr"/>
-            <a:r>
-              <a:rPr sz="2200" b="0" i="1">
-                <a:solidFill>
-                  <a:srgbClr val="8C8C8C"/>
-                </a:solidFill>
-                <a:latin typeface="Arial"/>
-              </a:rPr>
-              <a:t/>
             </a:r>
           </a:p>
         </p:txBody>
@@ -3859,8 +3579,8 @@
         </p:nvSpPr>
         <p:spPr>
           <a:xfrm>
-            <a:off x="594360" y="2258568"/>
-            <a:ext cx="11002975" cy="685800"/>
+            <a:off x="640080" y="2052828"/>
+            <a:ext cx="10911535" cy="731520"/>
           </a:xfrm>
           <a:prstGeom prst="rect">
             <a:avLst/>
@@ -3875,7 +3595,7 @@
           <a:p>
             <a:pPr algn="ctr"/>
             <a:r>
-              <a:rPr sz="4400" b="1" i="0">
+              <a:rPr sz="4800" b="1" i="0">
                 <a:solidFill>
                   <a:srgbClr val="FFFFFF"/>
                 </a:solidFill>
@@ -3894,8 +3614,8 @@
         </p:nvSpPr>
         <p:spPr>
           <a:xfrm>
-            <a:off x="594360" y="2980944"/>
-            <a:ext cx="11002975" cy="347472"/>
+            <a:off x="640080" y="2985516"/>
+            <a:ext cx="10911535" cy="731520"/>
           </a:xfrm>
           <a:prstGeom prst="rect">
             <a:avLst/>
@@ -3910,83 +3630,13 @@
           <a:p>
             <a:pPr algn="ctr"/>
             <a:r>
-              <a:rPr sz="2200" b="0" i="1">
-                <a:solidFill>
-                  <a:srgbClr val="8C8C8C"/>
-                </a:solidFill>
-                <a:latin typeface="Arial"/>
-              </a:rPr>
-              <a:t/>
-            </a:r>
-          </a:p>
-        </p:txBody>
-      </p:sp>
-      <p:sp>
-        <p:nvSpPr>
-          <p:cNvPr id="4" name="TextBox 3"/>
-          <p:cNvSpPr txBox="1"/>
-          <p:nvPr/>
-        </p:nvSpPr>
-        <p:spPr>
-          <a:xfrm>
-            <a:off x="594360" y="3529584"/>
-            <a:ext cx="11002975" cy="685800"/>
-          </a:xfrm>
-          <a:prstGeom prst="rect">
-            <a:avLst/>
-          </a:prstGeom>
-          <a:noFill/>
-        </p:spPr>
-        <p:txBody>
-          <a:bodyPr wrap="square">
-            <a:spAutoFit/>
-          </a:bodyPr>
-          <a:lstStyle/>
-          <a:p>
-            <a:pPr algn="ctr"/>
-            <a:r>
-              <a:rPr sz="4400" b="1" i="0">
+              <a:rPr sz="4800" b="1" i="0">
                 <a:solidFill>
                   <a:srgbClr val="FFFFFF"/>
                 </a:solidFill>
                 <a:latin typeface="Arial"/>
               </a:rPr>
               <a:t>Nosso Deus, Nosso Deus</a:t>
-            </a:r>
-          </a:p>
-        </p:txBody>
-      </p:sp>
-      <p:sp>
-        <p:nvSpPr>
-          <p:cNvPr id="5" name="TextBox 4"/>
-          <p:cNvSpPr txBox="1"/>
-          <p:nvPr/>
-        </p:nvSpPr>
-        <p:spPr>
-          <a:xfrm>
-            <a:off x="594360" y="4251960"/>
-            <a:ext cx="11002975" cy="347472"/>
-          </a:xfrm>
-          <a:prstGeom prst="rect">
-            <a:avLst/>
-          </a:prstGeom>
-          <a:noFill/>
-        </p:spPr>
-        <p:txBody>
-          <a:bodyPr wrap="square">
-            <a:spAutoFit/>
-          </a:bodyPr>
-          <a:lstStyle/>
-          <a:p>
-            <a:pPr algn="ctr"/>
-            <a:r>
-              <a:rPr sz="2200" b="0" i="1">
-                <a:solidFill>
-                  <a:srgbClr val="8C8C8C"/>
-                </a:solidFill>
-                <a:latin typeface="Arial"/>
-              </a:rPr>
-              <a:t/>
             </a:r>
           </a:p>
         </p:txBody>
@@ -4025,8 +3675,8 @@
         </p:nvSpPr>
         <p:spPr>
           <a:xfrm>
-            <a:off x="594360" y="2258568"/>
-            <a:ext cx="11002975" cy="685800"/>
+            <a:off x="640080" y="2052828"/>
+            <a:ext cx="10911535" cy="731520"/>
           </a:xfrm>
           <a:prstGeom prst="rect">
             <a:avLst/>
@@ -4041,7 +3691,7 @@
           <a:p>
             <a:pPr algn="ctr"/>
             <a:r>
-              <a:rPr sz="4400" b="1" i="0">
+              <a:rPr sz="4800" b="1" i="0">
                 <a:solidFill>
                   <a:srgbClr val="FFFFFF"/>
                 </a:solidFill>
@@ -4060,8 +3710,8 @@
         </p:nvSpPr>
         <p:spPr>
           <a:xfrm>
-            <a:off x="594360" y="2980944"/>
-            <a:ext cx="11002975" cy="347472"/>
+            <a:off x="640080" y="2985516"/>
+            <a:ext cx="10911535" cy="731520"/>
           </a:xfrm>
           <a:prstGeom prst="rect">
             <a:avLst/>
@@ -4076,9 +3726,44 @@
           <a:p>
             <a:pPr algn="ctr"/>
             <a:r>
-              <a:rPr sz="2200" b="0" i="1">
-                <a:solidFill>
-                  <a:srgbClr val="8C8C8C"/>
+              <a:rPr sz="4800" b="1" i="0">
+                <a:solidFill>
+                  <a:srgbClr val="FFFFFF"/>
+                </a:solidFill>
+                <a:latin typeface="Arial"/>
+              </a:rPr>
+              <a:t>Deus, tu és grande</a:t>
+            </a:r>
+          </a:p>
+        </p:txBody>
+      </p:sp>
+      <p:sp>
+        <p:nvSpPr>
+          <p:cNvPr id="4" name="TextBox 3"/>
+          <p:cNvSpPr txBox="1"/>
+          <p:nvPr/>
+        </p:nvSpPr>
+        <p:spPr>
+          <a:xfrm>
+            <a:off x="640080" y="4128516"/>
+            <a:ext cx="10911535" cy="310896"/>
+          </a:xfrm>
+          <a:prstGeom prst="rect">
+            <a:avLst/>
+          </a:prstGeom>
+          <a:noFill/>
+        </p:spPr>
+        <p:txBody>
+          <a:bodyPr wrap="square">
+            <a:spAutoFit/>
+          </a:bodyPr>
+          <a:lstStyle/>
+          <a:p>
+            <a:pPr algn="ctr"/>
+            <a:r>
+              <a:rPr sz="2000" b="0" i="0">
+                <a:solidFill>
+                  <a:srgbClr val="828282"/>
                 </a:solidFill>
                 <a:latin typeface="Arial"/>
               </a:rPr>
@@ -4089,49 +3774,14 @@
       </p:sp>
       <p:sp>
         <p:nvSpPr>
-          <p:cNvPr id="4" name="TextBox 3"/>
-          <p:cNvSpPr txBox="1"/>
-          <p:nvPr/>
-        </p:nvSpPr>
-        <p:spPr>
-          <a:xfrm>
-            <a:off x="594360" y="3529584"/>
-            <a:ext cx="11002975" cy="685800"/>
-          </a:xfrm>
-          <a:prstGeom prst="rect">
-            <a:avLst/>
-          </a:prstGeom>
-          <a:noFill/>
-        </p:spPr>
-        <p:txBody>
-          <a:bodyPr wrap="square">
-            <a:spAutoFit/>
-          </a:bodyPr>
-          <a:lstStyle/>
-          <a:p>
-            <a:pPr algn="ctr"/>
-            <a:r>
-              <a:rPr sz="4400" b="1" i="0">
-                <a:solidFill>
-                  <a:srgbClr val="FFFFFF"/>
-                </a:solidFill>
-                <a:latin typeface="Arial"/>
-              </a:rPr>
-              <a:t>Deus, tu és grande</a:t>
-            </a:r>
-          </a:p>
-        </p:txBody>
-      </p:sp>
-      <p:sp>
-        <p:nvSpPr>
           <p:cNvPr id="5" name="TextBox 4"/>
           <p:cNvSpPr txBox="1"/>
           <p:nvPr/>
         </p:nvSpPr>
         <p:spPr>
           <a:xfrm>
-            <a:off x="594360" y="4251960"/>
-            <a:ext cx="11002975" cy="347472"/>
+            <a:off x="640080" y="4494276"/>
+            <a:ext cx="10911535" cy="310896"/>
           </a:xfrm>
           <a:prstGeom prst="rect">
             <a:avLst/>
@@ -4146,9 +3796,9 @@
           <a:p>
             <a:pPr algn="ctr"/>
             <a:r>
-              <a:rPr sz="2200" b="0" i="1">
-                <a:solidFill>
-                  <a:srgbClr val="8C8C8C"/>
+              <a:rPr sz="2000" b="0" i="0">
+                <a:solidFill>
+                  <a:srgbClr val="828282"/>
                 </a:solidFill>
                 <a:latin typeface="Arial"/>
               </a:rPr>
@@ -4191,8 +3841,8 @@
         </p:nvSpPr>
         <p:spPr>
           <a:xfrm>
-            <a:off x="594360" y="2258568"/>
-            <a:ext cx="11002975" cy="685800"/>
+            <a:off x="640080" y="2052828"/>
+            <a:ext cx="10911535" cy="731520"/>
           </a:xfrm>
           <a:prstGeom prst="rect">
             <a:avLst/>
@@ -4207,7 +3857,7 @@
           <a:p>
             <a:pPr algn="ctr"/>
             <a:r>
-              <a:rPr sz="4400" b="1" i="0">
+              <a:rPr sz="4800" b="1" i="0">
                 <a:solidFill>
                   <a:srgbClr val="FFFFFF"/>
                 </a:solidFill>
@@ -4226,8 +3876,8 @@
         </p:nvSpPr>
         <p:spPr>
           <a:xfrm>
-            <a:off x="594360" y="2980944"/>
-            <a:ext cx="11002975" cy="347472"/>
+            <a:off x="640080" y="2985516"/>
+            <a:ext cx="10911535" cy="731520"/>
           </a:xfrm>
           <a:prstGeom prst="rect">
             <a:avLst/>
@@ -4242,9 +3892,44 @@
           <a:p>
             <a:pPr algn="ctr"/>
             <a:r>
-              <a:rPr sz="2200" b="0" i="1">
-                <a:solidFill>
-                  <a:srgbClr val="8C8C8C"/>
+              <a:rPr sz="4800" b="1" i="0">
+                <a:solidFill>
+                  <a:srgbClr val="FFFFFF"/>
+                </a:solidFill>
+                <a:latin typeface="Arial"/>
+              </a:rPr>
+              <a:t>Mais elevado que qualquer outro</a:t>
+            </a:r>
+          </a:p>
+        </p:txBody>
+      </p:sp>
+      <p:sp>
+        <p:nvSpPr>
+          <p:cNvPr id="4" name="TextBox 3"/>
+          <p:cNvSpPr txBox="1"/>
+          <p:nvPr/>
+        </p:nvSpPr>
+        <p:spPr>
+          <a:xfrm>
+            <a:off x="640080" y="4128516"/>
+            <a:ext cx="10911535" cy="310896"/>
+          </a:xfrm>
+          <a:prstGeom prst="rect">
+            <a:avLst/>
+          </a:prstGeom>
+          <a:noFill/>
+        </p:spPr>
+        <p:txBody>
+          <a:bodyPr wrap="square">
+            <a:spAutoFit/>
+          </a:bodyPr>
+          <a:lstStyle/>
+          <a:p>
+            <a:pPr algn="ctr"/>
+            <a:r>
+              <a:rPr sz="2000" b="0" i="0">
+                <a:solidFill>
+                  <a:srgbClr val="828282"/>
                 </a:solidFill>
                 <a:latin typeface="Arial"/>
               </a:rPr>
@@ -4255,49 +3940,14 @@
       </p:sp>
       <p:sp>
         <p:nvSpPr>
-          <p:cNvPr id="4" name="TextBox 3"/>
-          <p:cNvSpPr txBox="1"/>
-          <p:nvPr/>
-        </p:nvSpPr>
-        <p:spPr>
-          <a:xfrm>
-            <a:off x="594360" y="3529584"/>
-            <a:ext cx="11002975" cy="685800"/>
-          </a:xfrm>
-          <a:prstGeom prst="rect">
-            <a:avLst/>
-          </a:prstGeom>
-          <a:noFill/>
-        </p:spPr>
-        <p:txBody>
-          <a:bodyPr wrap="square">
-            <a:spAutoFit/>
-          </a:bodyPr>
-          <a:lstStyle/>
-          <a:p>
-            <a:pPr algn="ctr"/>
-            <a:r>
-              <a:rPr sz="4400" b="1" i="0">
-                <a:solidFill>
-                  <a:srgbClr val="FFFFFF"/>
-                </a:solidFill>
-                <a:latin typeface="Arial"/>
-              </a:rPr>
-              <a:t>Mais elevado que qualquer outro</a:t>
-            </a:r>
-          </a:p>
-        </p:txBody>
-      </p:sp>
-      <p:sp>
-        <p:nvSpPr>
           <p:cNvPr id="5" name="TextBox 4"/>
           <p:cNvSpPr txBox="1"/>
           <p:nvPr/>
         </p:nvSpPr>
         <p:spPr>
           <a:xfrm>
-            <a:off x="594360" y="4251960"/>
-            <a:ext cx="11002975" cy="347472"/>
+            <a:off x="640080" y="4494276"/>
+            <a:ext cx="10911535" cy="310896"/>
           </a:xfrm>
           <a:prstGeom prst="rect">
             <a:avLst/>
@@ -4312,9 +3962,9 @@
           <a:p>
             <a:pPr algn="ctr"/>
             <a:r>
-              <a:rPr sz="2200" b="0" i="1">
-                <a:solidFill>
-                  <a:srgbClr val="8C8C8C"/>
+              <a:rPr sz="2000" b="0" i="0">
+                <a:solidFill>
+                  <a:srgbClr val="828282"/>
                 </a:solidFill>
                 <a:latin typeface="Arial"/>
               </a:rPr>
@@ -4357,8 +4007,8 @@
         </p:nvSpPr>
         <p:spPr>
           <a:xfrm>
-            <a:off x="594360" y="2258568"/>
-            <a:ext cx="11002975" cy="685800"/>
+            <a:off x="640080" y="2052828"/>
+            <a:ext cx="10911535" cy="731520"/>
           </a:xfrm>
           <a:prstGeom prst="rect">
             <a:avLst/>
@@ -4373,7 +4023,7 @@
           <a:p>
             <a:pPr algn="ctr"/>
             <a:r>
-              <a:rPr sz="4400" b="1" i="0">
+              <a:rPr sz="4800" b="1" i="0">
                 <a:solidFill>
                   <a:srgbClr val="FFFFFF"/>
                 </a:solidFill>
@@ -4392,8 +4042,8 @@
         </p:nvSpPr>
         <p:spPr>
           <a:xfrm>
-            <a:off x="594360" y="2980944"/>
-            <a:ext cx="11002975" cy="347472"/>
+            <a:off x="640080" y="2985516"/>
+            <a:ext cx="10911535" cy="731520"/>
           </a:xfrm>
           <a:prstGeom prst="rect">
             <a:avLst/>
@@ -4408,83 +4058,48 @@
           <a:p>
             <a:pPr algn="ctr"/>
             <a:r>
-              <a:rPr sz="2200" b="0" i="1">
-                <a:solidFill>
-                  <a:srgbClr val="8C8C8C"/>
+              <a:rPr sz="4800" b="1" i="0">
+                <a:solidFill>
+                  <a:srgbClr val="FFFFFF"/>
+                </a:solidFill>
+                <a:latin typeface="Arial"/>
+              </a:rPr>
+              <a:t>Grande em poder</a:t>
+            </a:r>
+          </a:p>
+        </p:txBody>
+      </p:sp>
+      <p:sp>
+        <p:nvSpPr>
+          <p:cNvPr id="4" name="TextBox 3"/>
+          <p:cNvSpPr txBox="1"/>
+          <p:nvPr/>
+        </p:nvSpPr>
+        <p:spPr>
+          <a:xfrm>
+            <a:off x="640080" y="4128516"/>
+            <a:ext cx="10911535" cy="310896"/>
+          </a:xfrm>
+          <a:prstGeom prst="rect">
+            <a:avLst/>
+          </a:prstGeom>
+          <a:noFill/>
+        </p:spPr>
+        <p:txBody>
+          <a:bodyPr wrap="square">
+            <a:spAutoFit/>
+          </a:bodyPr>
+          <a:lstStyle/>
+          <a:p>
+            <a:pPr algn="ctr"/>
+            <a:r>
+              <a:rPr sz="2000" b="0" i="0">
+                <a:solidFill>
+                  <a:srgbClr val="828282"/>
                 </a:solidFill>
                 <a:latin typeface="Arial"/>
               </a:rPr>
               <a:t>ことあるだろう</a:t>
-            </a:r>
-          </a:p>
-        </p:txBody>
-      </p:sp>
-      <p:sp>
-        <p:nvSpPr>
-          <p:cNvPr id="4" name="TextBox 3"/>
-          <p:cNvSpPr txBox="1"/>
-          <p:nvPr/>
-        </p:nvSpPr>
-        <p:spPr>
-          <a:xfrm>
-            <a:off x="594360" y="3529584"/>
-            <a:ext cx="11002975" cy="685800"/>
-          </a:xfrm>
-          <a:prstGeom prst="rect">
-            <a:avLst/>
-          </a:prstGeom>
-          <a:noFill/>
-        </p:spPr>
-        <p:txBody>
-          <a:bodyPr wrap="square">
-            <a:spAutoFit/>
-          </a:bodyPr>
-          <a:lstStyle/>
-          <a:p>
-            <a:pPr algn="ctr"/>
-            <a:r>
-              <a:rPr sz="4400" b="1" i="0">
-                <a:solidFill>
-                  <a:srgbClr val="FFFFFF"/>
-                </a:solidFill>
-                <a:latin typeface="Arial"/>
-              </a:rPr>
-              <a:t>Grande em poder</a:t>
-            </a:r>
-          </a:p>
-        </p:txBody>
-      </p:sp>
-      <p:sp>
-        <p:nvSpPr>
-          <p:cNvPr id="5" name="TextBox 4"/>
-          <p:cNvSpPr txBox="1"/>
-          <p:nvPr/>
-        </p:nvSpPr>
-        <p:spPr>
-          <a:xfrm>
-            <a:off x="594360" y="4251960"/>
-            <a:ext cx="11002975" cy="347472"/>
-          </a:xfrm>
-          <a:prstGeom prst="rect">
-            <a:avLst/>
-          </a:prstGeom>
-          <a:noFill/>
-        </p:spPr>
-        <p:txBody>
-          <a:bodyPr wrap="square">
-            <a:spAutoFit/>
-          </a:bodyPr>
-          <a:lstStyle/>
-          <a:p>
-            <a:pPr algn="ctr"/>
-            <a:r>
-              <a:rPr sz="2200" b="0" i="1">
-                <a:solidFill>
-                  <a:srgbClr val="8C8C8C"/>
-                </a:solidFill>
-                <a:latin typeface="Arial"/>
-              </a:rPr>
-              <a:t/>
             </a:r>
           </a:p>
         </p:txBody>
@@ -4523,8 +4138,8 @@
         </p:nvSpPr>
         <p:spPr>
           <a:xfrm>
-            <a:off x="594360" y="2258568"/>
-            <a:ext cx="11002975" cy="685800"/>
+            <a:off x="640080" y="2052828"/>
+            <a:ext cx="10911535" cy="731520"/>
           </a:xfrm>
           <a:prstGeom prst="rect">
             <a:avLst/>
@@ -4539,7 +4154,7 @@
           <a:p>
             <a:pPr algn="ctr"/>
             <a:r>
-              <a:rPr sz="4400" b="1" i="0">
+              <a:rPr sz="4800" b="1" i="0">
                 <a:solidFill>
                   <a:srgbClr val="FFFFFF"/>
                 </a:solidFill>
@@ -4558,8 +4173,8 @@
         </p:nvSpPr>
         <p:spPr>
           <a:xfrm>
-            <a:off x="594360" y="2980944"/>
-            <a:ext cx="11002975" cy="347472"/>
+            <a:off x="640080" y="2985516"/>
+            <a:ext cx="10911535" cy="731520"/>
           </a:xfrm>
           <a:prstGeom prst="rect">
             <a:avLst/>
@@ -4574,83 +4189,13 @@
           <a:p>
             <a:pPr algn="ctr"/>
             <a:r>
-              <a:rPr sz="2200" b="0" i="1">
-                <a:solidFill>
-                  <a:srgbClr val="8C8C8C"/>
-                </a:solidFill>
-                <a:latin typeface="Arial"/>
-              </a:rPr>
-              <a:t/>
-            </a:r>
-          </a:p>
-        </p:txBody>
-      </p:sp>
-      <p:sp>
-        <p:nvSpPr>
-          <p:cNvPr id="4" name="TextBox 3"/>
-          <p:cNvSpPr txBox="1"/>
-          <p:nvPr/>
-        </p:nvSpPr>
-        <p:spPr>
-          <a:xfrm>
-            <a:off x="594360" y="3529584"/>
-            <a:ext cx="11002975" cy="685800"/>
-          </a:xfrm>
-          <a:prstGeom prst="rect">
-            <a:avLst/>
-          </a:prstGeom>
-          <a:noFill/>
-        </p:spPr>
-        <p:txBody>
-          <a:bodyPr wrap="square">
-            <a:spAutoFit/>
-          </a:bodyPr>
-          <a:lstStyle/>
-          <a:p>
-            <a:pPr algn="ctr"/>
-            <a:r>
-              <a:rPr sz="4400" b="1" i="0">
+              <a:rPr sz="4800" b="1" i="0">
                 <a:solidFill>
                   <a:srgbClr val="FFFFFF"/>
                 </a:solidFill>
                 <a:latin typeface="Arial"/>
               </a:rPr>
               <a:t>Nosso Deus é maior</a:t>
-            </a:r>
-          </a:p>
-        </p:txBody>
-      </p:sp>
-      <p:sp>
-        <p:nvSpPr>
-          <p:cNvPr id="5" name="TextBox 4"/>
-          <p:cNvSpPr txBox="1"/>
-          <p:nvPr/>
-        </p:nvSpPr>
-        <p:spPr>
-          <a:xfrm>
-            <a:off x="594360" y="4251960"/>
-            <a:ext cx="11002975" cy="347472"/>
-          </a:xfrm>
-          <a:prstGeom prst="rect">
-            <a:avLst/>
-          </a:prstGeom>
-          <a:noFill/>
-        </p:spPr>
-        <p:txBody>
-          <a:bodyPr wrap="square">
-            <a:spAutoFit/>
-          </a:bodyPr>
-          <a:lstStyle/>
-          <a:p>
-            <a:pPr algn="ctr"/>
-            <a:r>
-              <a:rPr sz="2200" b="0" i="1">
-                <a:solidFill>
-                  <a:srgbClr val="8C8C8C"/>
-                </a:solidFill>
-                <a:latin typeface="Arial"/>
-              </a:rPr>
-              <a:t/>
             </a:r>
           </a:p>
         </p:txBody>
@@ -4689,8 +4234,8 @@
         </p:nvSpPr>
         <p:spPr>
           <a:xfrm>
-            <a:off x="594360" y="2894076"/>
-            <a:ext cx="11002975" cy="685800"/>
+            <a:off x="640080" y="2702052"/>
+            <a:ext cx="10911535" cy="731520"/>
           </a:xfrm>
           <a:prstGeom prst="rect">
             <a:avLst/>
@@ -4705,48 +4250,13 @@
           <a:p>
             <a:pPr algn="ctr"/>
             <a:r>
-              <a:rPr sz="4400" b="1" i="0">
+              <a:rPr sz="4800" b="1" i="0">
                 <a:solidFill>
                   <a:srgbClr val="FFFFFF"/>
                 </a:solidFill>
                 <a:latin typeface="Arial"/>
               </a:rPr>
               <a:t>Nosso Deus é mais forte</a:t>
-            </a:r>
-          </a:p>
-        </p:txBody>
-      </p:sp>
-      <p:sp>
-        <p:nvSpPr>
-          <p:cNvPr id="3" name="TextBox 2"/>
-          <p:cNvSpPr txBox="1"/>
-          <p:nvPr/>
-        </p:nvSpPr>
-        <p:spPr>
-          <a:xfrm>
-            <a:off x="594360" y="3616452"/>
-            <a:ext cx="11002975" cy="347472"/>
-          </a:xfrm>
-          <a:prstGeom prst="rect">
-            <a:avLst/>
-          </a:prstGeom>
-          <a:noFill/>
-        </p:spPr>
-        <p:txBody>
-          <a:bodyPr wrap="square">
-            <a:spAutoFit/>
-          </a:bodyPr>
-          <a:lstStyle/>
-          <a:p>
-            <a:pPr algn="ctr"/>
-            <a:r>
-              <a:rPr sz="2200" b="0" i="1">
-                <a:solidFill>
-                  <a:srgbClr val="8C8C8C"/>
-                </a:solidFill>
-                <a:latin typeface="Arial"/>
-              </a:rPr>
-              <a:t/>
             </a:r>
           </a:p>
         </p:txBody>
@@ -4785,8 +4295,8 @@
         </p:nvSpPr>
         <p:spPr>
           <a:xfrm>
-            <a:off x="594360" y="2258568"/>
-            <a:ext cx="11002975" cy="685800"/>
+            <a:off x="640080" y="2052828"/>
+            <a:ext cx="10911535" cy="731520"/>
           </a:xfrm>
           <a:prstGeom prst="rect">
             <a:avLst/>
@@ -4801,7 +4311,7 @@
           <a:p>
             <a:pPr algn="ctr"/>
             <a:r>
-              <a:rPr sz="4400" b="1" i="0">
+              <a:rPr sz="4800" b="1" i="0">
                 <a:solidFill>
                   <a:srgbClr val="FFFFFF"/>
                 </a:solidFill>
@@ -4820,8 +4330,8 @@
         </p:nvSpPr>
         <p:spPr>
           <a:xfrm>
-            <a:off x="594360" y="2980944"/>
-            <a:ext cx="11002975" cy="347472"/>
+            <a:off x="640080" y="2985516"/>
+            <a:ext cx="10911535" cy="731520"/>
           </a:xfrm>
           <a:prstGeom prst="rect">
             <a:avLst/>
@@ -4836,83 +4346,13 @@
           <a:p>
             <a:pPr algn="ctr"/>
             <a:r>
-              <a:rPr sz="2200" b="0" i="1">
-                <a:solidFill>
-                  <a:srgbClr val="8C8C8C"/>
-                </a:solidFill>
-                <a:latin typeface="Arial"/>
-              </a:rPr>
-              <a:t/>
-            </a:r>
-          </a:p>
-        </p:txBody>
-      </p:sp>
-      <p:sp>
-        <p:nvSpPr>
-          <p:cNvPr id="4" name="TextBox 3"/>
-          <p:cNvSpPr txBox="1"/>
-          <p:nvPr/>
-        </p:nvSpPr>
-        <p:spPr>
-          <a:xfrm>
-            <a:off x="594360" y="3529584"/>
-            <a:ext cx="11002975" cy="685800"/>
-          </a:xfrm>
-          <a:prstGeom prst="rect">
-            <a:avLst/>
-          </a:prstGeom>
-          <a:noFill/>
-        </p:spPr>
-        <p:txBody>
-          <a:bodyPr wrap="square">
-            <a:spAutoFit/>
-          </a:bodyPr>
-          <a:lstStyle/>
-          <a:p>
-            <a:pPr algn="ctr"/>
-            <a:r>
-              <a:rPr sz="4400" b="1" i="0">
+              <a:rPr sz="4800" b="1" i="0">
                 <a:solidFill>
                   <a:srgbClr val="FFFFFF"/>
                 </a:solidFill>
                 <a:latin typeface="Arial"/>
               </a:rPr>
               <a:t>Dentro da noite brilhou</a:t>
-            </a:r>
-          </a:p>
-        </p:txBody>
-      </p:sp>
-      <p:sp>
-        <p:nvSpPr>
-          <p:cNvPr id="5" name="TextBox 4"/>
-          <p:cNvSpPr txBox="1"/>
-          <p:nvPr/>
-        </p:nvSpPr>
-        <p:spPr>
-          <a:xfrm>
-            <a:off x="594360" y="4251960"/>
-            <a:ext cx="11002975" cy="347472"/>
-          </a:xfrm>
-          <a:prstGeom prst="rect">
-            <a:avLst/>
-          </a:prstGeom>
-          <a:noFill/>
-        </p:spPr>
-        <p:txBody>
-          <a:bodyPr wrap="square">
-            <a:spAutoFit/>
-          </a:bodyPr>
-          <a:lstStyle/>
-          <a:p>
-            <a:pPr algn="ctr"/>
-            <a:r>
-              <a:rPr sz="2200" b="0" i="1">
-                <a:solidFill>
-                  <a:srgbClr val="8C8C8C"/>
-                </a:solidFill>
-                <a:latin typeface="Arial"/>
-              </a:rPr>
-              <a:t/>
             </a:r>
           </a:p>
         </p:txBody>
@@ -4951,8 +4391,8 @@
         </p:nvSpPr>
         <p:spPr>
           <a:xfrm>
-            <a:off x="594360" y="1837944"/>
-            <a:ext cx="11002975" cy="685800"/>
+            <a:off x="640080" y="1650492"/>
+            <a:ext cx="10911535" cy="731520"/>
           </a:xfrm>
           <a:prstGeom prst="rect">
             <a:avLst/>
@@ -4967,7 +4407,7 @@
           <a:p>
             <a:pPr algn="ctr"/>
             <a:r>
-              <a:rPr sz="4400" b="1" i="0">
+              <a:rPr sz="4800" b="1" i="0">
                 <a:solidFill>
                   <a:srgbClr val="FFFFFF"/>
                 </a:solidFill>
@@ -4986,8 +4426,8 @@
         </p:nvSpPr>
         <p:spPr>
           <a:xfrm>
-            <a:off x="594360" y="2560320"/>
-            <a:ext cx="11002975" cy="384048"/>
+            <a:off x="640080" y="2418588"/>
+            <a:ext cx="10911535" cy="365760"/>
           </a:xfrm>
           <a:prstGeom prst="rect">
             <a:avLst/>
@@ -5004,7 +4444,7 @@
             <a:r>
               <a:rPr sz="2400" b="0" i="1">
                 <a:solidFill>
-                  <a:srgbClr val="B4B4B4"/>
+                  <a:srgbClr val="AAAAAA"/>
                 </a:solidFill>
                 <a:latin typeface="Arial"/>
               </a:rPr>
@@ -5021,8 +4461,8 @@
         </p:nvSpPr>
         <p:spPr>
           <a:xfrm>
-            <a:off x="594360" y="2980944"/>
-            <a:ext cx="11002975" cy="347472"/>
+            <a:off x="640080" y="2985516"/>
+            <a:ext cx="10911535" cy="731520"/>
           </a:xfrm>
           <a:prstGeom prst="rect">
             <a:avLst/>
@@ -5037,13 +4477,13 @@
           <a:p>
             <a:pPr algn="ctr"/>
             <a:r>
-              <a:rPr sz="2000" b="0" i="1">
-                <a:solidFill>
-                  <a:srgbClr val="8C8C8C"/>
+              <a:rPr sz="4800" b="1" i="0">
+                <a:solidFill>
+                  <a:srgbClr val="FFFFFF"/>
                 </a:solidFill>
                 <a:latin typeface="Arial"/>
               </a:rPr>
-              <a:t/>
+              <a:t>ならぶもの      いない</a:t>
             </a:r>
           </a:p>
         </p:txBody>
@@ -5056,8 +4496,8 @@
         </p:nvSpPr>
         <p:spPr>
           <a:xfrm>
-            <a:off x="594360" y="3529584"/>
-            <a:ext cx="11002975" cy="685800"/>
+            <a:off x="640080" y="3753612"/>
+            <a:ext cx="10911535" cy="365760"/>
           </a:xfrm>
           <a:prstGeom prst="rect">
             <a:avLst/>
@@ -5072,83 +4512,13 @@
           <a:p>
             <a:pPr algn="ctr"/>
             <a:r>
-              <a:rPr sz="4400" b="1" i="0">
-                <a:solidFill>
-                  <a:srgbClr val="FFFFFF"/>
-                </a:solidFill>
-                <a:latin typeface="Arial"/>
-              </a:rPr>
-              <a:t>ならぶもの      いない</a:t>
-            </a:r>
-          </a:p>
-        </p:txBody>
-      </p:sp>
-      <p:sp>
-        <p:nvSpPr>
-          <p:cNvPr id="6" name="TextBox 5"/>
-          <p:cNvSpPr txBox="1"/>
-          <p:nvPr/>
-        </p:nvSpPr>
-        <p:spPr>
-          <a:xfrm>
-            <a:off x="594360" y="4251960"/>
-            <a:ext cx="11002975" cy="384048"/>
-          </a:xfrm>
-          <a:prstGeom prst="rect">
-            <a:avLst/>
-          </a:prstGeom>
-          <a:noFill/>
-        </p:spPr>
-        <p:txBody>
-          <a:bodyPr wrap="square">
-            <a:spAutoFit/>
-          </a:bodyPr>
-          <a:lstStyle/>
-          <a:p>
-            <a:pPr algn="ctr"/>
-            <a:r>
               <a:rPr sz="2400" b="0" i="1">
                 <a:solidFill>
-                  <a:srgbClr val="B4B4B4"/>
+                  <a:srgbClr val="AAAAAA"/>
                 </a:solidFill>
                 <a:latin typeface="Arial"/>
               </a:rPr>
               <a:t>narabu mono   inai</a:t>
-            </a:r>
-          </a:p>
-        </p:txBody>
-      </p:sp>
-      <p:sp>
-        <p:nvSpPr>
-          <p:cNvPr id="7" name="TextBox 6"/>
-          <p:cNvSpPr txBox="1"/>
-          <p:nvPr/>
-        </p:nvSpPr>
-        <p:spPr>
-          <a:xfrm>
-            <a:off x="594360" y="4672584"/>
-            <a:ext cx="11002975" cy="347472"/>
-          </a:xfrm>
-          <a:prstGeom prst="rect">
-            <a:avLst/>
-          </a:prstGeom>
-          <a:noFill/>
-        </p:spPr>
-        <p:txBody>
-          <a:bodyPr wrap="square">
-            <a:spAutoFit/>
-          </a:bodyPr>
-          <a:lstStyle/>
-          <a:p>
-            <a:pPr algn="ctr"/>
-            <a:r>
-              <a:rPr sz="2000" b="0" i="1">
-                <a:solidFill>
-                  <a:srgbClr val="8C8C8C"/>
-                </a:solidFill>
-                <a:latin typeface="Arial"/>
-              </a:rPr>
-              <a:t/>
             </a:r>
           </a:p>
         </p:txBody>
@@ -5187,8 +4557,8 @@
         </p:nvSpPr>
         <p:spPr>
           <a:xfrm>
-            <a:off x="594360" y="2258568"/>
-            <a:ext cx="11002975" cy="685800"/>
+            <a:off x="640080" y="2052828"/>
+            <a:ext cx="10911535" cy="731520"/>
           </a:xfrm>
           <a:prstGeom prst="rect">
             <a:avLst/>
@@ -5203,7 +4573,7 @@
           <a:p>
             <a:pPr algn="ctr"/>
             <a:r>
-              <a:rPr sz="4400" b="1" i="0">
+              <a:rPr sz="4800" b="1" i="0">
                 <a:solidFill>
                   <a:srgbClr val="FFFFFF"/>
                 </a:solidFill>
@@ -5222,8 +4592,8 @@
         </p:nvSpPr>
         <p:spPr>
           <a:xfrm>
-            <a:off x="594360" y="2980944"/>
-            <a:ext cx="11002975" cy="347472"/>
+            <a:off x="640080" y="2985516"/>
+            <a:ext cx="10911535" cy="731520"/>
           </a:xfrm>
           <a:prstGeom prst="rect">
             <a:avLst/>
@@ -5238,83 +4608,13 @@
           <a:p>
             <a:pPr algn="ctr"/>
             <a:r>
-              <a:rPr sz="2200" b="0" i="1">
-                <a:solidFill>
-                  <a:srgbClr val="8C8C8C"/>
-                </a:solidFill>
-                <a:latin typeface="Arial"/>
-              </a:rPr>
-              <a:t/>
-            </a:r>
-          </a:p>
-        </p:txBody>
-      </p:sp>
-      <p:sp>
-        <p:nvSpPr>
-          <p:cNvPr id="4" name="TextBox 3"/>
-          <p:cNvSpPr txBox="1"/>
-          <p:nvPr/>
-        </p:nvSpPr>
-        <p:spPr>
-          <a:xfrm>
-            <a:off x="594360" y="3529584"/>
-            <a:ext cx="11002975" cy="685800"/>
-          </a:xfrm>
-          <a:prstGeom prst="rect">
-            <a:avLst/>
-          </a:prstGeom>
-          <a:noFill/>
-        </p:spPr>
-        <p:txBody>
-          <a:bodyPr wrap="square">
-            <a:spAutoFit/>
-          </a:bodyPr>
-          <a:lstStyle/>
-          <a:p>
-            <a:pPr algn="ctr"/>
-            <a:r>
-              <a:rPr sz="4400" b="1" i="0">
+              <a:rPr sz="4800" b="1" i="0">
                 <a:solidFill>
                   <a:srgbClr val="FFFFFF"/>
                 </a:solidFill>
                 <a:latin typeface="Arial"/>
               </a:rPr>
               <a:t>Não há outro igual</a:t>
-            </a:r>
-          </a:p>
-        </p:txBody>
-      </p:sp>
-      <p:sp>
-        <p:nvSpPr>
-          <p:cNvPr id="5" name="TextBox 4"/>
-          <p:cNvSpPr txBox="1"/>
-          <p:nvPr/>
-        </p:nvSpPr>
-        <p:spPr>
-          <a:xfrm>
-            <a:off x="594360" y="4251960"/>
-            <a:ext cx="11002975" cy="347472"/>
-          </a:xfrm>
-          <a:prstGeom prst="rect">
-            <a:avLst/>
-          </a:prstGeom>
-          <a:noFill/>
-        </p:spPr>
-        <p:txBody>
-          <a:bodyPr wrap="square">
-            <a:spAutoFit/>
-          </a:bodyPr>
-          <a:lstStyle/>
-          <a:p>
-            <a:pPr algn="ctr"/>
-            <a:r>
-              <a:rPr sz="2200" b="0" i="1">
-                <a:solidFill>
-                  <a:srgbClr val="8C8C8C"/>
-                </a:solidFill>
-                <a:latin typeface="Arial"/>
-              </a:rPr>
-              <a:t/>
             </a:r>
           </a:p>
         </p:txBody>
@@ -5353,8 +4653,8 @@
         </p:nvSpPr>
         <p:spPr>
           <a:xfrm>
-            <a:off x="594360" y="2258568"/>
-            <a:ext cx="11002975" cy="685800"/>
+            <a:off x="640080" y="2052828"/>
+            <a:ext cx="10911535" cy="731520"/>
           </a:xfrm>
           <a:prstGeom prst="rect">
             <a:avLst/>
@@ -5369,7 +4669,7 @@
           <a:p>
             <a:pPr algn="ctr"/>
             <a:r>
-              <a:rPr sz="3434" b="1" i="0">
+              <a:rPr sz="3700" b="1" i="0">
                 <a:solidFill>
                   <a:srgbClr val="FFFFFF"/>
                 </a:solidFill>
@@ -5388,8 +4688,8 @@
         </p:nvSpPr>
         <p:spPr>
           <a:xfrm>
-            <a:off x="594360" y="2980944"/>
-            <a:ext cx="11002975" cy="347472"/>
+            <a:off x="640080" y="2985516"/>
+            <a:ext cx="10911535" cy="731520"/>
           </a:xfrm>
           <a:prstGeom prst="rect">
             <a:avLst/>
@@ -5404,83 +4704,13 @@
           <a:p>
             <a:pPr algn="ctr"/>
             <a:r>
-              <a:rPr sz="2200" b="0" i="1">
-                <a:solidFill>
-                  <a:srgbClr val="8C8C8C"/>
-                </a:solidFill>
-                <a:latin typeface="Arial"/>
-              </a:rPr>
-              <a:t/>
-            </a:r>
-          </a:p>
-        </p:txBody>
-      </p:sp>
-      <p:sp>
-        <p:nvSpPr>
-          <p:cNvPr id="4" name="TextBox 3"/>
-          <p:cNvSpPr txBox="1"/>
-          <p:nvPr/>
-        </p:nvSpPr>
-        <p:spPr>
-          <a:xfrm>
-            <a:off x="594360" y="3529584"/>
-            <a:ext cx="11002975" cy="685800"/>
-          </a:xfrm>
-          <a:prstGeom prst="rect">
-            <a:avLst/>
-          </a:prstGeom>
-          <a:noFill/>
-        </p:spPr>
-        <p:txBody>
-          <a:bodyPr wrap="square">
-            <a:spAutoFit/>
-          </a:bodyPr>
-          <a:lstStyle/>
-          <a:p>
-            <a:pPr algn="ctr"/>
-            <a:r>
-              <a:rPr sz="4400" b="1" i="0">
+              <a:rPr sz="4800" b="1" i="0">
                 <a:solidFill>
                   <a:srgbClr val="FFFFFF"/>
                 </a:solidFill>
                 <a:latin typeface="Arial"/>
               </a:rPr>
               <a:t>Nosso Deus é curador</a:t>
-            </a:r>
-          </a:p>
-        </p:txBody>
-      </p:sp>
-      <p:sp>
-        <p:nvSpPr>
-          <p:cNvPr id="5" name="TextBox 4"/>
-          <p:cNvSpPr txBox="1"/>
-          <p:nvPr/>
-        </p:nvSpPr>
-        <p:spPr>
-          <a:xfrm>
-            <a:off x="594360" y="4251960"/>
-            <a:ext cx="11002975" cy="347472"/>
-          </a:xfrm>
-          <a:prstGeom prst="rect">
-            <a:avLst/>
-          </a:prstGeom>
-          <a:noFill/>
-        </p:spPr>
-        <p:txBody>
-          <a:bodyPr wrap="square">
-            <a:spAutoFit/>
-          </a:bodyPr>
-          <a:lstStyle/>
-          <a:p>
-            <a:pPr algn="ctr"/>
-            <a:r>
-              <a:rPr sz="2200" b="0" i="1">
-                <a:solidFill>
-                  <a:srgbClr val="8C8C8C"/>
-                </a:solidFill>
-                <a:latin typeface="Arial"/>
-              </a:rPr>
-              <a:t/>
             </a:r>
           </a:p>
         </p:txBody>
@@ -5519,8 +4749,8 @@
         </p:nvSpPr>
         <p:spPr>
           <a:xfrm>
-            <a:off x="594360" y="2258568"/>
-            <a:ext cx="11002975" cy="685800"/>
+            <a:off x="640080" y="2052828"/>
+            <a:ext cx="10911535" cy="731520"/>
           </a:xfrm>
           <a:prstGeom prst="rect">
             <a:avLst/>
@@ -5535,7 +4765,7 @@
           <a:p>
             <a:pPr algn="ctr"/>
             <a:r>
-              <a:rPr sz="4400" b="1" i="0">
+              <a:rPr sz="4800" b="1" i="0">
                 <a:solidFill>
                   <a:srgbClr val="FFFFFF"/>
                 </a:solidFill>
@@ -5554,8 +4784,8 @@
         </p:nvSpPr>
         <p:spPr>
           <a:xfrm>
-            <a:off x="594360" y="2980944"/>
-            <a:ext cx="11002975" cy="347472"/>
+            <a:off x="640080" y="2985516"/>
+            <a:ext cx="10911535" cy="731520"/>
           </a:xfrm>
           <a:prstGeom prst="rect">
             <a:avLst/>
@@ -5570,83 +4800,13 @@
           <a:p>
             <a:pPr algn="ctr"/>
             <a:r>
-              <a:rPr sz="2200" b="0" i="1">
-                <a:solidFill>
-                  <a:srgbClr val="8C8C8C"/>
-                </a:solidFill>
-                <a:latin typeface="Arial"/>
-              </a:rPr>
-              <a:t/>
-            </a:r>
-          </a:p>
-        </p:txBody>
-      </p:sp>
-      <p:sp>
-        <p:nvSpPr>
-          <p:cNvPr id="4" name="TextBox 3"/>
-          <p:cNvSpPr txBox="1"/>
-          <p:nvPr/>
-        </p:nvSpPr>
-        <p:spPr>
-          <a:xfrm>
-            <a:off x="594360" y="3529584"/>
-            <a:ext cx="11002975" cy="685800"/>
-          </a:xfrm>
-          <a:prstGeom prst="rect">
-            <a:avLst/>
-          </a:prstGeom>
-          <a:noFill/>
-        </p:spPr>
-        <p:txBody>
-          <a:bodyPr wrap="square">
-            <a:spAutoFit/>
-          </a:bodyPr>
-          <a:lstStyle/>
-          <a:p>
-            <a:pPr algn="ctr"/>
-            <a:r>
-              <a:rPr sz="4400" b="1" i="0">
+              <a:rPr sz="4800" b="1" i="0">
                 <a:solidFill>
                   <a:srgbClr val="FFFFFF"/>
                 </a:solidFill>
                 <a:latin typeface="Arial"/>
               </a:rPr>
               <a:t>Nosso Deus, Nosso Deus</a:t>
-            </a:r>
-          </a:p>
-        </p:txBody>
-      </p:sp>
-      <p:sp>
-        <p:nvSpPr>
-          <p:cNvPr id="5" name="TextBox 4"/>
-          <p:cNvSpPr txBox="1"/>
-          <p:nvPr/>
-        </p:nvSpPr>
-        <p:spPr>
-          <a:xfrm>
-            <a:off x="594360" y="4251960"/>
-            <a:ext cx="11002975" cy="347472"/>
-          </a:xfrm>
-          <a:prstGeom prst="rect">
-            <a:avLst/>
-          </a:prstGeom>
-          <a:noFill/>
-        </p:spPr>
-        <p:txBody>
-          <a:bodyPr wrap="square">
-            <a:spAutoFit/>
-          </a:bodyPr>
-          <a:lstStyle/>
-          <a:p>
-            <a:pPr algn="ctr"/>
-            <a:r>
-              <a:rPr sz="2200" b="0" i="1">
-                <a:solidFill>
-                  <a:srgbClr val="8C8C8C"/>
-                </a:solidFill>
-                <a:latin typeface="Arial"/>
-              </a:rPr>
-              <a:t/>
             </a:r>
           </a:p>
         </p:txBody>
@@ -5685,8 +4845,8 @@
         </p:nvSpPr>
         <p:spPr>
           <a:xfrm>
-            <a:off x="594360" y="2258568"/>
-            <a:ext cx="11002975" cy="685800"/>
+            <a:off x="640080" y="2052828"/>
+            <a:ext cx="10911535" cy="731520"/>
           </a:xfrm>
           <a:prstGeom prst="rect">
             <a:avLst/>
@@ -5701,7 +4861,7 @@
           <a:p>
             <a:pPr algn="ctr"/>
             <a:r>
-              <a:rPr sz="4400" b="1" i="0">
+              <a:rPr sz="4800" b="1" i="0">
                 <a:solidFill>
                   <a:srgbClr val="FFFFFF"/>
                 </a:solidFill>
@@ -5720,8 +4880,8 @@
         </p:nvSpPr>
         <p:spPr>
           <a:xfrm>
-            <a:off x="594360" y="2980944"/>
-            <a:ext cx="11002975" cy="347472"/>
+            <a:off x="640080" y="2985516"/>
+            <a:ext cx="10911535" cy="731520"/>
           </a:xfrm>
           <a:prstGeom prst="rect">
             <a:avLst/>
@@ -5736,83 +4896,13 @@
           <a:p>
             <a:pPr algn="ctr"/>
             <a:r>
-              <a:rPr sz="2200" b="0" i="1">
-                <a:solidFill>
-                  <a:srgbClr val="8C8C8C"/>
-                </a:solidFill>
-                <a:latin typeface="Arial"/>
-              </a:rPr>
-              <a:t/>
-            </a:r>
-          </a:p>
-        </p:txBody>
-      </p:sp>
-      <p:sp>
-        <p:nvSpPr>
-          <p:cNvPr id="4" name="TextBox 3"/>
-          <p:cNvSpPr txBox="1"/>
-          <p:nvPr/>
-        </p:nvSpPr>
-        <p:spPr>
-          <a:xfrm>
-            <a:off x="594360" y="3529584"/>
-            <a:ext cx="11002975" cy="685800"/>
-          </a:xfrm>
-          <a:prstGeom prst="rect">
-            <a:avLst/>
-          </a:prstGeom>
-          <a:noFill/>
-        </p:spPr>
-        <p:txBody>
-          <a:bodyPr wrap="square">
-            <a:spAutoFit/>
-          </a:bodyPr>
-          <a:lstStyle/>
-          <a:p>
-            <a:pPr algn="ctr"/>
-            <a:r>
-              <a:rPr sz="4400" b="1" i="0">
+              <a:rPr sz="4800" b="1" i="0">
                 <a:solidFill>
                   <a:srgbClr val="FFFFFF"/>
                 </a:solidFill>
                 <a:latin typeface="Arial"/>
               </a:rPr>
               <a:t>Dentro da noite brilhou</a:t>
-            </a:r>
-          </a:p>
-        </p:txBody>
-      </p:sp>
-      <p:sp>
-        <p:nvSpPr>
-          <p:cNvPr id="5" name="TextBox 4"/>
-          <p:cNvSpPr txBox="1"/>
-          <p:nvPr/>
-        </p:nvSpPr>
-        <p:spPr>
-          <a:xfrm>
-            <a:off x="594360" y="4251960"/>
-            <a:ext cx="11002975" cy="347472"/>
-          </a:xfrm>
-          <a:prstGeom prst="rect">
-            <a:avLst/>
-          </a:prstGeom>
-          <a:noFill/>
-        </p:spPr>
-        <p:txBody>
-          <a:bodyPr wrap="square">
-            <a:spAutoFit/>
-          </a:bodyPr>
-          <a:lstStyle/>
-          <a:p>
-            <a:pPr algn="ctr"/>
-            <a:r>
-              <a:rPr sz="2200" b="0" i="1">
-                <a:solidFill>
-                  <a:srgbClr val="8C8C8C"/>
-                </a:solidFill>
-                <a:latin typeface="Arial"/>
-              </a:rPr>
-              <a:t/>
             </a:r>
           </a:p>
         </p:txBody>
@@ -5851,8 +4941,8 @@
         </p:nvSpPr>
         <p:spPr>
           <a:xfrm>
-            <a:off x="594360" y="2258568"/>
-            <a:ext cx="11002975" cy="685800"/>
+            <a:off x="640080" y="2052828"/>
+            <a:ext cx="10911535" cy="731520"/>
           </a:xfrm>
           <a:prstGeom prst="rect">
             <a:avLst/>
@@ -5867,7 +4957,7 @@
           <a:p>
             <a:pPr algn="ctr"/>
             <a:r>
-              <a:rPr sz="4400" b="1" i="0">
+              <a:rPr sz="4800" b="1" i="0">
                 <a:solidFill>
                   <a:srgbClr val="FFFFFF"/>
                 </a:solidFill>
@@ -5886,8 +4976,8 @@
         </p:nvSpPr>
         <p:spPr>
           <a:xfrm>
-            <a:off x="594360" y="2980944"/>
-            <a:ext cx="11002975" cy="347472"/>
+            <a:off x="640080" y="2985516"/>
+            <a:ext cx="10911535" cy="731520"/>
           </a:xfrm>
           <a:prstGeom prst="rect">
             <a:avLst/>
@@ -5902,83 +4992,13 @@
           <a:p>
             <a:pPr algn="ctr"/>
             <a:r>
-              <a:rPr sz="2200" b="0" i="1">
-                <a:solidFill>
-                  <a:srgbClr val="8C8C8C"/>
-                </a:solidFill>
-                <a:latin typeface="Arial"/>
-              </a:rPr>
-              <a:t/>
-            </a:r>
-          </a:p>
-        </p:txBody>
-      </p:sp>
-      <p:sp>
-        <p:nvSpPr>
-          <p:cNvPr id="4" name="TextBox 3"/>
-          <p:cNvSpPr txBox="1"/>
-          <p:nvPr/>
-        </p:nvSpPr>
-        <p:spPr>
-          <a:xfrm>
-            <a:off x="594360" y="3529584"/>
-            <a:ext cx="11002975" cy="685800"/>
-          </a:xfrm>
-          <a:prstGeom prst="rect">
-            <a:avLst/>
-          </a:prstGeom>
-          <a:noFill/>
-        </p:spPr>
-        <p:txBody>
-          <a:bodyPr wrap="square">
-            <a:spAutoFit/>
-          </a:bodyPr>
-          <a:lstStyle/>
-          <a:p>
-            <a:pPr algn="ctr"/>
-            <a:r>
-              <a:rPr sz="4400" b="1" i="0">
+              <a:rPr sz="4800" b="1" i="0">
                 <a:solidFill>
                   <a:srgbClr val="FFFFFF"/>
                 </a:solidFill>
                 <a:latin typeface="Arial"/>
               </a:rPr>
               <a:t>Não há outro igual</a:t>
-            </a:r>
-          </a:p>
-        </p:txBody>
-      </p:sp>
-      <p:sp>
-        <p:nvSpPr>
-          <p:cNvPr id="5" name="TextBox 4"/>
-          <p:cNvSpPr txBox="1"/>
-          <p:nvPr/>
-        </p:nvSpPr>
-        <p:spPr>
-          <a:xfrm>
-            <a:off x="594360" y="4251960"/>
-            <a:ext cx="11002975" cy="347472"/>
-          </a:xfrm>
-          <a:prstGeom prst="rect">
-            <a:avLst/>
-          </a:prstGeom>
-          <a:noFill/>
-        </p:spPr>
-        <p:txBody>
-          <a:bodyPr wrap="square">
-            <a:spAutoFit/>
-          </a:bodyPr>
-          <a:lstStyle/>
-          <a:p>
-            <a:pPr algn="ctr"/>
-            <a:r>
-              <a:rPr sz="2200" b="0" i="1">
-                <a:solidFill>
-                  <a:srgbClr val="8C8C8C"/>
-                </a:solidFill>
-                <a:latin typeface="Arial"/>
-              </a:rPr>
-              <a:t/>
             </a:r>
           </a:p>
         </p:txBody>
@@ -6017,8 +5037,8 @@
         </p:nvSpPr>
         <p:spPr>
           <a:xfrm>
-            <a:off x="594360" y="2258568"/>
-            <a:ext cx="11002975" cy="685800"/>
+            <a:off x="640080" y="2052828"/>
+            <a:ext cx="10911535" cy="731520"/>
           </a:xfrm>
           <a:prstGeom prst="rect">
             <a:avLst/>
@@ -6033,7 +5053,7 @@
           <a:p>
             <a:pPr algn="ctr"/>
             <a:r>
-              <a:rPr sz="3434" b="1" i="0">
+              <a:rPr sz="3700" b="1" i="0">
                 <a:solidFill>
                   <a:srgbClr val="FFFFFF"/>
                 </a:solidFill>
@@ -6052,8 +5072,8 @@
         </p:nvSpPr>
         <p:spPr>
           <a:xfrm>
-            <a:off x="594360" y="2980944"/>
-            <a:ext cx="11002975" cy="347472"/>
+            <a:off x="640080" y="2985516"/>
+            <a:ext cx="10911535" cy="731520"/>
           </a:xfrm>
           <a:prstGeom prst="rect">
             <a:avLst/>
@@ -6068,83 +5088,13 @@
           <a:p>
             <a:pPr algn="ctr"/>
             <a:r>
-              <a:rPr sz="2200" b="0" i="1">
-                <a:solidFill>
-                  <a:srgbClr val="8C8C8C"/>
-                </a:solidFill>
-                <a:latin typeface="Arial"/>
-              </a:rPr>
-              <a:t/>
-            </a:r>
-          </a:p>
-        </p:txBody>
-      </p:sp>
-      <p:sp>
-        <p:nvSpPr>
-          <p:cNvPr id="4" name="TextBox 3"/>
-          <p:cNvSpPr txBox="1"/>
-          <p:nvPr/>
-        </p:nvSpPr>
-        <p:spPr>
-          <a:xfrm>
-            <a:off x="594360" y="3529584"/>
-            <a:ext cx="11002975" cy="685800"/>
-          </a:xfrm>
-          <a:prstGeom prst="rect">
-            <a:avLst/>
-          </a:prstGeom>
-          <a:noFill/>
-        </p:spPr>
-        <p:txBody>
-          <a:bodyPr wrap="square">
-            <a:spAutoFit/>
-          </a:bodyPr>
-          <a:lstStyle/>
-          <a:p>
-            <a:pPr algn="ctr"/>
-            <a:r>
-              <a:rPr sz="4400" b="1" i="0">
+              <a:rPr sz="4800" b="1" i="0">
                 <a:solidFill>
                   <a:srgbClr val="FFFFFF"/>
                 </a:solidFill>
                 <a:latin typeface="Arial"/>
               </a:rPr>
               <a:t>Nosso Deus é curador</a:t>
-            </a:r>
-          </a:p>
-        </p:txBody>
-      </p:sp>
-      <p:sp>
-        <p:nvSpPr>
-          <p:cNvPr id="5" name="TextBox 4"/>
-          <p:cNvSpPr txBox="1"/>
-          <p:nvPr/>
-        </p:nvSpPr>
-        <p:spPr>
-          <a:xfrm>
-            <a:off x="594360" y="4251960"/>
-            <a:ext cx="11002975" cy="347472"/>
-          </a:xfrm>
-          <a:prstGeom prst="rect">
-            <a:avLst/>
-          </a:prstGeom>
-          <a:noFill/>
-        </p:spPr>
-        <p:txBody>
-          <a:bodyPr wrap="square">
-            <a:spAutoFit/>
-          </a:bodyPr>
-          <a:lstStyle/>
-          <a:p>
-            <a:pPr algn="ctr"/>
-            <a:r>
-              <a:rPr sz="2200" b="0" i="1">
-                <a:solidFill>
-                  <a:srgbClr val="8C8C8C"/>
-                </a:solidFill>
-                <a:latin typeface="Arial"/>
-              </a:rPr>
-              <a:t/>
             </a:r>
           </a:p>
         </p:txBody>
@@ -6183,8 +5133,8 @@
         </p:nvSpPr>
         <p:spPr>
           <a:xfrm>
-            <a:off x="594360" y="2258568"/>
-            <a:ext cx="11002975" cy="685800"/>
+            <a:off x="640080" y="2052828"/>
+            <a:ext cx="10911535" cy="731520"/>
           </a:xfrm>
           <a:prstGeom prst="rect">
             <a:avLst/>
@@ -6199,7 +5149,7 @@
           <a:p>
             <a:pPr algn="ctr"/>
             <a:r>
-              <a:rPr sz="4400" b="1" i="0">
+              <a:rPr sz="4800" b="1" i="0">
                 <a:solidFill>
                   <a:srgbClr val="FFFFFF"/>
                 </a:solidFill>
@@ -6218,8 +5168,8 @@
         </p:nvSpPr>
         <p:spPr>
           <a:xfrm>
-            <a:off x="594360" y="2980944"/>
-            <a:ext cx="11002975" cy="347472"/>
+            <a:off x="640080" y="2985516"/>
+            <a:ext cx="10911535" cy="731520"/>
           </a:xfrm>
           <a:prstGeom prst="rect">
             <a:avLst/>
@@ -6234,83 +5184,13 @@
           <a:p>
             <a:pPr algn="ctr"/>
             <a:r>
-              <a:rPr sz="2200" b="0" i="1">
-                <a:solidFill>
-                  <a:srgbClr val="8C8C8C"/>
-                </a:solidFill>
-                <a:latin typeface="Arial"/>
-              </a:rPr>
-              <a:t/>
-            </a:r>
-          </a:p>
-        </p:txBody>
-      </p:sp>
-      <p:sp>
-        <p:nvSpPr>
-          <p:cNvPr id="4" name="TextBox 3"/>
-          <p:cNvSpPr txBox="1"/>
-          <p:nvPr/>
-        </p:nvSpPr>
-        <p:spPr>
-          <a:xfrm>
-            <a:off x="594360" y="3529584"/>
-            <a:ext cx="11002975" cy="685800"/>
-          </a:xfrm>
-          <a:prstGeom prst="rect">
-            <a:avLst/>
-          </a:prstGeom>
-          <a:noFill/>
-        </p:spPr>
-        <p:txBody>
-          <a:bodyPr wrap="square">
-            <a:spAutoFit/>
-          </a:bodyPr>
-          <a:lstStyle/>
-          <a:p>
-            <a:pPr algn="ctr"/>
-            <a:r>
-              <a:rPr sz="4400" b="1" i="0">
+              <a:rPr sz="4800" b="1" i="0">
                 <a:solidFill>
                   <a:srgbClr val="FFFFFF"/>
                 </a:solidFill>
                 <a:latin typeface="Arial"/>
               </a:rPr>
               <a:t>Nosso Deus, Nosso Deus</a:t>
-            </a:r>
-          </a:p>
-        </p:txBody>
-      </p:sp>
-      <p:sp>
-        <p:nvSpPr>
-          <p:cNvPr id="5" name="TextBox 4"/>
-          <p:cNvSpPr txBox="1"/>
-          <p:nvPr/>
-        </p:nvSpPr>
-        <p:spPr>
-          <a:xfrm>
-            <a:off x="594360" y="4251960"/>
-            <a:ext cx="11002975" cy="347472"/>
-          </a:xfrm>
-          <a:prstGeom prst="rect">
-            <a:avLst/>
-          </a:prstGeom>
-          <a:noFill/>
-        </p:spPr>
-        <p:txBody>
-          <a:bodyPr wrap="square">
-            <a:spAutoFit/>
-          </a:bodyPr>
-          <a:lstStyle/>
-          <a:p>
-            <a:pPr algn="ctr"/>
-            <a:r>
-              <a:rPr sz="2200" b="0" i="1">
-                <a:solidFill>
-                  <a:srgbClr val="8C8C8C"/>
-                </a:solidFill>
-                <a:latin typeface="Arial"/>
-              </a:rPr>
-              <a:t/>
             </a:r>
           </a:p>
         </p:txBody>
@@ -6349,8 +5229,8 @@
         </p:nvSpPr>
         <p:spPr>
           <a:xfrm>
-            <a:off x="594360" y="1837944"/>
-            <a:ext cx="11002975" cy="685800"/>
+            <a:off x="640080" y="1650492"/>
+            <a:ext cx="10911535" cy="731520"/>
           </a:xfrm>
           <a:prstGeom prst="rect">
             <a:avLst/>
@@ -6365,7 +5245,7 @@
           <a:p>
             <a:pPr algn="ctr"/>
             <a:r>
-              <a:rPr sz="4400" b="1" i="0">
+              <a:rPr sz="4800" b="1" i="0">
                 <a:solidFill>
                   <a:srgbClr val="FFFFFF"/>
                 </a:solidFill>
@@ -6384,8 +5264,8 @@
         </p:nvSpPr>
         <p:spPr>
           <a:xfrm>
-            <a:off x="594360" y="2560320"/>
-            <a:ext cx="11002975" cy="384048"/>
+            <a:off x="640080" y="2418588"/>
+            <a:ext cx="10911535" cy="365760"/>
           </a:xfrm>
           <a:prstGeom prst="rect">
             <a:avLst/>
@@ -6402,7 +5282,7 @@
             <a:r>
               <a:rPr sz="2400" b="0" i="1">
                 <a:solidFill>
-                  <a:srgbClr val="B4B4B4"/>
+                  <a:srgbClr val="AAAAAA"/>
                 </a:solidFill>
                 <a:latin typeface="Arial"/>
               </a:rPr>
@@ -6419,8 +5299,8 @@
         </p:nvSpPr>
         <p:spPr>
           <a:xfrm>
-            <a:off x="594360" y="2980944"/>
-            <a:ext cx="11002975" cy="347472"/>
+            <a:off x="640080" y="2985516"/>
+            <a:ext cx="10911535" cy="731520"/>
           </a:xfrm>
           <a:prstGeom prst="rect">
             <a:avLst/>
@@ -6435,9 +5315,79 @@
           <a:p>
             <a:pPr algn="ctr"/>
             <a:r>
+              <a:rPr sz="4800" b="1" i="0">
+                <a:solidFill>
+                  <a:srgbClr val="FFFFFF"/>
+                </a:solidFill>
+                <a:latin typeface="Arial"/>
+              </a:rPr>
+              <a:t>何を恐れる　   事あるだろう</a:t>
+            </a:r>
+          </a:p>
+        </p:txBody>
+      </p:sp>
+      <p:sp>
+        <p:nvSpPr>
+          <p:cNvPr id="5" name="TextBox 4"/>
+          <p:cNvSpPr txBox="1"/>
+          <p:nvPr/>
+        </p:nvSpPr>
+        <p:spPr>
+          <a:xfrm>
+            <a:off x="640080" y="3753612"/>
+            <a:ext cx="10911535" cy="365760"/>
+          </a:xfrm>
+          <a:prstGeom prst="rect">
+            <a:avLst/>
+          </a:prstGeom>
+          <a:noFill/>
+        </p:spPr>
+        <p:txBody>
+          <a:bodyPr wrap="square">
+            <a:spAutoFit/>
+          </a:bodyPr>
+          <a:lstStyle/>
+          <a:p>
+            <a:pPr algn="ctr"/>
+            <a:r>
+              <a:rPr sz="2400" b="0" i="1">
+                <a:solidFill>
+                  <a:srgbClr val="AAAAAA"/>
+                </a:solidFill>
+                <a:latin typeface="Arial"/>
+              </a:rPr>
+              <a:t>nanio osoreru  koto aru darou</a:t>
+            </a:r>
+          </a:p>
+        </p:txBody>
+      </p:sp>
+      <p:sp>
+        <p:nvSpPr>
+          <p:cNvPr id="6" name="TextBox 5"/>
+          <p:cNvSpPr txBox="1"/>
+          <p:nvPr/>
+        </p:nvSpPr>
+        <p:spPr>
+          <a:xfrm>
+            <a:off x="640080" y="4530852"/>
+            <a:ext cx="10911535" cy="310896"/>
+          </a:xfrm>
+          <a:prstGeom prst="rect">
+            <a:avLst/>
+          </a:prstGeom>
+          <a:noFill/>
+        </p:spPr>
+        <p:txBody>
+          <a:bodyPr wrap="square">
+            <a:spAutoFit/>
+          </a:bodyPr>
+          <a:lstStyle/>
+          <a:p>
+            <a:pPr algn="ctr"/>
+            <a:r>
               <a:rPr sz="2000" b="0" i="1">
                 <a:solidFill>
-                  <a:srgbClr val="8C8C8C"/>
+                  <a:srgbClr val="828282"/>
                 </a:solidFill>
                 <a:latin typeface="Arial"/>
               </a:rPr>
@@ -6448,84 +5398,14 @@
       </p:sp>
       <p:sp>
         <p:nvSpPr>
-          <p:cNvPr id="5" name="TextBox 4"/>
-          <p:cNvSpPr txBox="1"/>
-          <p:nvPr/>
-        </p:nvSpPr>
-        <p:spPr>
-          <a:xfrm>
-            <a:off x="594360" y="3529584"/>
-            <a:ext cx="11002975" cy="685800"/>
-          </a:xfrm>
-          <a:prstGeom prst="rect">
-            <a:avLst/>
-          </a:prstGeom>
-          <a:noFill/>
-        </p:spPr>
-        <p:txBody>
-          <a:bodyPr wrap="square">
-            <a:spAutoFit/>
-          </a:bodyPr>
-          <a:lstStyle/>
-          <a:p>
-            <a:pPr algn="ctr"/>
-            <a:r>
-              <a:rPr sz="4400" b="1" i="0">
-                <a:solidFill>
-                  <a:srgbClr val="FFFFFF"/>
-                </a:solidFill>
-                <a:latin typeface="Arial"/>
-              </a:rPr>
-              <a:t>何を恐れる　   事あるだろう</a:t>
-            </a:r>
-          </a:p>
-        </p:txBody>
-      </p:sp>
-      <p:sp>
-        <p:nvSpPr>
-          <p:cNvPr id="6" name="TextBox 5"/>
-          <p:cNvSpPr txBox="1"/>
-          <p:nvPr/>
-        </p:nvSpPr>
-        <p:spPr>
-          <a:xfrm>
-            <a:off x="594360" y="4251960"/>
-            <a:ext cx="11002975" cy="384048"/>
-          </a:xfrm>
-          <a:prstGeom prst="rect">
-            <a:avLst/>
-          </a:prstGeom>
-          <a:noFill/>
-        </p:spPr>
-        <p:txBody>
-          <a:bodyPr wrap="square">
-            <a:spAutoFit/>
-          </a:bodyPr>
-          <a:lstStyle/>
-          <a:p>
-            <a:pPr algn="ctr"/>
-            <a:r>
-              <a:rPr sz="2400" b="0" i="1">
-                <a:solidFill>
-                  <a:srgbClr val="B4B4B4"/>
-                </a:solidFill>
-                <a:latin typeface="Arial"/>
-              </a:rPr>
-              <a:t>nanio osoreru  koto aru darou</a:t>
-            </a:r>
-          </a:p>
-        </p:txBody>
-      </p:sp>
-      <p:sp>
-        <p:nvSpPr>
           <p:cNvPr id="7" name="TextBox 6"/>
           <p:cNvSpPr txBox="1"/>
           <p:nvPr/>
         </p:nvSpPr>
         <p:spPr>
           <a:xfrm>
-            <a:off x="594360" y="4672584"/>
-            <a:ext cx="11002975" cy="347472"/>
+            <a:off x="640080" y="4896612"/>
+            <a:ext cx="10911535" cy="310896"/>
           </a:xfrm>
           <a:prstGeom prst="rect">
             <a:avLst/>
@@ -6542,7 +5422,7 @@
             <a:r>
               <a:rPr sz="2000" b="0" i="1">
                 <a:solidFill>
-                  <a:srgbClr val="8C8C8C"/>
+                  <a:srgbClr val="828282"/>
                 </a:solidFill>
                 <a:latin typeface="Arial"/>
               </a:rPr>
@@ -6585,8 +5465,8 @@
         </p:nvSpPr>
         <p:spPr>
           <a:xfrm>
-            <a:off x="594360" y="1837944"/>
-            <a:ext cx="11002975" cy="685800"/>
+            <a:off x="640080" y="1650492"/>
+            <a:ext cx="10911535" cy="731520"/>
           </a:xfrm>
           <a:prstGeom prst="rect">
             <a:avLst/>
@@ -6601,7 +5481,7 @@
           <a:p>
             <a:pPr algn="ctr"/>
             <a:r>
-              <a:rPr sz="4400" b="1" i="0">
+              <a:rPr sz="4800" b="1" i="0">
                 <a:solidFill>
                   <a:srgbClr val="FFFFFF"/>
                 </a:solidFill>
@@ -6620,8 +5500,8 @@
         </p:nvSpPr>
         <p:spPr>
           <a:xfrm>
-            <a:off x="594360" y="2560320"/>
-            <a:ext cx="11002975" cy="384048"/>
+            <a:off x="640080" y="2418588"/>
+            <a:ext cx="10911535" cy="365760"/>
           </a:xfrm>
           <a:prstGeom prst="rect">
             <a:avLst/>
@@ -6638,7 +5518,7 @@
             <a:r>
               <a:rPr sz="2400" b="0" i="1">
                 <a:solidFill>
-                  <a:srgbClr val="B4B4B4"/>
+                  <a:srgbClr val="AAAAAA"/>
                 </a:solidFill>
                 <a:latin typeface="Arial"/>
               </a:rPr>
@@ -6655,8 +5535,8 @@
         </p:nvSpPr>
         <p:spPr>
           <a:xfrm>
-            <a:off x="594360" y="2980944"/>
-            <a:ext cx="11002975" cy="347472"/>
+            <a:off x="640080" y="2985516"/>
+            <a:ext cx="10911535" cy="731520"/>
           </a:xfrm>
           <a:prstGeom prst="rect">
             <a:avLst/>
@@ -6671,9 +5551,79 @@
           <a:p>
             <a:pPr algn="ctr"/>
             <a:r>
+              <a:rPr sz="4800" b="1" i="0">
+                <a:solidFill>
+                  <a:srgbClr val="FFFFFF"/>
+                </a:solidFill>
+                <a:latin typeface="Arial"/>
+              </a:rPr>
+              <a:t>何を恐れる　   事あるだろう</a:t>
+            </a:r>
+          </a:p>
+        </p:txBody>
+      </p:sp>
+      <p:sp>
+        <p:nvSpPr>
+          <p:cNvPr id="5" name="TextBox 4"/>
+          <p:cNvSpPr txBox="1"/>
+          <p:nvPr/>
+        </p:nvSpPr>
+        <p:spPr>
+          <a:xfrm>
+            <a:off x="640080" y="3753612"/>
+            <a:ext cx="10911535" cy="365760"/>
+          </a:xfrm>
+          <a:prstGeom prst="rect">
+            <a:avLst/>
+          </a:prstGeom>
+          <a:noFill/>
+        </p:spPr>
+        <p:txBody>
+          <a:bodyPr wrap="square">
+            <a:spAutoFit/>
+          </a:bodyPr>
+          <a:lstStyle/>
+          <a:p>
+            <a:pPr algn="ctr"/>
+            <a:r>
+              <a:rPr sz="2400" b="0" i="1">
+                <a:solidFill>
+                  <a:srgbClr val="AAAAAA"/>
+                </a:solidFill>
+                <a:latin typeface="Arial"/>
+              </a:rPr>
+              <a:t>nanio osoreru  koto aru darou</a:t>
+            </a:r>
+          </a:p>
+        </p:txBody>
+      </p:sp>
+      <p:sp>
+        <p:nvSpPr>
+          <p:cNvPr id="6" name="TextBox 5"/>
+          <p:cNvSpPr txBox="1"/>
+          <p:nvPr/>
+        </p:nvSpPr>
+        <p:spPr>
+          <a:xfrm>
+            <a:off x="640080" y="4530852"/>
+            <a:ext cx="10911535" cy="310896"/>
+          </a:xfrm>
+          <a:prstGeom prst="rect">
+            <a:avLst/>
+          </a:prstGeom>
+          <a:noFill/>
+        </p:spPr>
+        <p:txBody>
+          <a:bodyPr wrap="square">
+            <a:spAutoFit/>
+          </a:bodyPr>
+          <a:lstStyle/>
+          <a:p>
+            <a:pPr algn="ctr"/>
+            <a:r>
               <a:rPr sz="2000" b="0" i="1">
                 <a:solidFill>
-                  <a:srgbClr val="8C8C8C"/>
+                  <a:srgbClr val="828282"/>
                 </a:solidFill>
                 <a:latin typeface="Arial"/>
               </a:rPr>
@@ -6684,84 +5634,14 @@
       </p:sp>
       <p:sp>
         <p:nvSpPr>
-          <p:cNvPr id="5" name="TextBox 4"/>
-          <p:cNvSpPr txBox="1"/>
-          <p:nvPr/>
-        </p:nvSpPr>
-        <p:spPr>
-          <a:xfrm>
-            <a:off x="594360" y="3529584"/>
-            <a:ext cx="11002975" cy="685800"/>
-          </a:xfrm>
-          <a:prstGeom prst="rect">
-            <a:avLst/>
-          </a:prstGeom>
-          <a:noFill/>
-        </p:spPr>
-        <p:txBody>
-          <a:bodyPr wrap="square">
-            <a:spAutoFit/>
-          </a:bodyPr>
-          <a:lstStyle/>
-          <a:p>
-            <a:pPr algn="ctr"/>
-            <a:r>
-              <a:rPr sz="4400" b="1" i="0">
-                <a:solidFill>
-                  <a:srgbClr val="FFFFFF"/>
-                </a:solidFill>
-                <a:latin typeface="Arial"/>
-              </a:rPr>
-              <a:t>何を恐れる　   事あるだろう</a:t>
-            </a:r>
-          </a:p>
-        </p:txBody>
-      </p:sp>
-      <p:sp>
-        <p:nvSpPr>
-          <p:cNvPr id="6" name="TextBox 5"/>
-          <p:cNvSpPr txBox="1"/>
-          <p:nvPr/>
-        </p:nvSpPr>
-        <p:spPr>
-          <a:xfrm>
-            <a:off x="594360" y="4251960"/>
-            <a:ext cx="11002975" cy="384048"/>
-          </a:xfrm>
-          <a:prstGeom prst="rect">
-            <a:avLst/>
-          </a:prstGeom>
-          <a:noFill/>
-        </p:spPr>
-        <p:txBody>
-          <a:bodyPr wrap="square">
-            <a:spAutoFit/>
-          </a:bodyPr>
-          <a:lstStyle/>
-          <a:p>
-            <a:pPr algn="ctr"/>
-            <a:r>
-              <a:rPr sz="2400" b="0" i="1">
-                <a:solidFill>
-                  <a:srgbClr val="B4B4B4"/>
-                </a:solidFill>
-                <a:latin typeface="Arial"/>
-              </a:rPr>
-              <a:t>nanio osoreru  koto aru darou</a:t>
-            </a:r>
-          </a:p>
-        </p:txBody>
-      </p:sp>
-      <p:sp>
-        <p:nvSpPr>
           <p:cNvPr id="7" name="TextBox 6"/>
           <p:cNvSpPr txBox="1"/>
           <p:nvPr/>
         </p:nvSpPr>
         <p:spPr>
           <a:xfrm>
-            <a:off x="594360" y="4672584"/>
-            <a:ext cx="11002975" cy="347472"/>
+            <a:off x="640080" y="4896612"/>
+            <a:ext cx="10911535" cy="310896"/>
           </a:xfrm>
           <a:prstGeom prst="rect">
             <a:avLst/>
@@ -6778,7 +5658,7 @@
             <a:r>
               <a:rPr sz="2000" b="0" i="1">
                 <a:solidFill>
-                  <a:srgbClr val="8C8C8C"/>
+                  <a:srgbClr val="828282"/>
                 </a:solidFill>
                 <a:latin typeface="Arial"/>
               </a:rPr>
@@ -6821,8 +5701,8 @@
         </p:nvSpPr>
         <p:spPr>
           <a:xfrm>
-            <a:off x="594360" y="2683764"/>
-            <a:ext cx="11002975" cy="685800"/>
+            <a:off x="640080" y="2500884"/>
+            <a:ext cx="10911535" cy="731520"/>
           </a:xfrm>
           <a:prstGeom prst="rect">
             <a:avLst/>
@@ -6837,7 +5717,7 @@
           <a:p>
             <a:pPr algn="ctr"/>
             <a:r>
-              <a:rPr sz="4400" b="1" i="0">
+              <a:rPr sz="4800" b="1" i="0">
                 <a:solidFill>
                   <a:srgbClr val="FFFFFF"/>
                 </a:solidFill>
@@ -6856,8 +5736,8 @@
         </p:nvSpPr>
         <p:spPr>
           <a:xfrm>
-            <a:off x="594360" y="3406140"/>
-            <a:ext cx="11002975" cy="384048"/>
+            <a:off x="640080" y="3268980"/>
+            <a:ext cx="10911535" cy="365760"/>
           </a:xfrm>
           <a:prstGeom prst="rect">
             <a:avLst/>
@@ -6874,7 +5754,7 @@
             <a:r>
               <a:rPr sz="2400" b="0" i="1">
                 <a:solidFill>
-                  <a:srgbClr val="B4B4B4"/>
+                  <a:srgbClr val="AAAAAA"/>
                 </a:solidFill>
                 <a:latin typeface="Arial"/>
               </a:rPr>
@@ -6891,8 +5771,8 @@
         </p:nvSpPr>
         <p:spPr>
           <a:xfrm>
-            <a:off x="594360" y="3826764"/>
-            <a:ext cx="11002975" cy="347472"/>
+            <a:off x="640080" y="4046220"/>
+            <a:ext cx="10911535" cy="310896"/>
           </a:xfrm>
           <a:prstGeom prst="rect">
             <a:avLst/>
@@ -6909,7 +5789,7 @@
             <a:r>
               <a:rPr sz="2000" b="0" i="1">
                 <a:solidFill>
-                  <a:srgbClr val="8C8C8C"/>
+                  <a:srgbClr val="828282"/>
                 </a:solidFill>
                 <a:latin typeface="Arial"/>
               </a:rPr>

--- a/output_pptx/Our_God.pptx
+++ b/output_pptx/Our_God.pptx
@@ -3257,6 +3257,76 @@
           </a:p>
         </p:txBody>
       </p:sp>
+      <p:sp>
+        <p:nvSpPr>
+          <p:cNvPr id="6" name="TextBox 5"/>
+          <p:cNvSpPr txBox="1"/>
+          <p:nvPr/>
+        </p:nvSpPr>
+        <p:spPr>
+          <a:xfrm>
+            <a:off x="640080" y="4530852"/>
+            <a:ext cx="10911535" cy="310896"/>
+          </a:xfrm>
+          <a:prstGeom prst="rect">
+            <a:avLst/>
+          </a:prstGeom>
+          <a:noFill/>
+        </p:spPr>
+        <p:txBody>
+          <a:bodyPr wrap="square">
+            <a:spAutoFit/>
+          </a:bodyPr>
+          <a:lstStyle/>
+          <a:p>
+            <a:pPr algn="ctr"/>
+            <a:r>
+              <a:rPr sz="2000" b="0" i="1">
+                <a:solidFill>
+                  <a:srgbClr val="828282"/>
+                </a:solidFill>
+                <a:latin typeface="Arial"/>
+              </a:rPr>
+              <a:t>Ao Senhor que abre nossos olhos com milagres</a:t>
+            </a:r>
+          </a:p>
+        </p:txBody>
+      </p:sp>
+      <p:sp>
+        <p:nvSpPr>
+          <p:cNvPr id="7" name="TextBox 6"/>
+          <p:cNvSpPr txBox="1"/>
+          <p:nvPr/>
+        </p:nvSpPr>
+        <p:spPr>
+          <a:xfrm>
+            <a:off x="640080" y="4896612"/>
+            <a:ext cx="10911535" cy="310896"/>
+          </a:xfrm>
+          <a:prstGeom prst="rect">
+            <a:avLst/>
+          </a:prstGeom>
+          <a:noFill/>
+        </p:spPr>
+        <p:txBody>
+          <a:bodyPr wrap="square">
+            <a:spAutoFit/>
+          </a:bodyPr>
+          <a:lstStyle/>
+          <a:p>
+            <a:pPr algn="ctr"/>
+            <a:r>
+              <a:rPr sz="2000" b="0" i="1">
+                <a:solidFill>
+                  <a:srgbClr val="828282"/>
+                </a:solidFill>
+                <a:latin typeface="Arial"/>
+              </a:rPr>
+              <a:t>Ninguém se compara</a:t>
+            </a:r>
+          </a:p>
+        </p:txBody>
+      </p:sp>
     </p:spTree>
   </p:cSld>
   <p:clrMapOvr>
@@ -3353,6 +3423,76 @@
           </a:p>
         </p:txBody>
       </p:sp>
+      <p:sp>
+        <p:nvSpPr>
+          <p:cNvPr id="4" name="TextBox 3"/>
+          <p:cNvSpPr txBox="1"/>
+          <p:nvPr/>
+        </p:nvSpPr>
+        <p:spPr>
+          <a:xfrm>
+            <a:off x="640080" y="4128516"/>
+            <a:ext cx="10911535" cy="310896"/>
+          </a:xfrm>
+          <a:prstGeom prst="rect">
+            <a:avLst/>
+          </a:prstGeom>
+          <a:noFill/>
+        </p:spPr>
+        <p:txBody>
+          <a:bodyPr wrap="square">
+            <a:spAutoFit/>
+          </a:bodyPr>
+          <a:lstStyle/>
+          <a:p>
+            <a:pPr algn="ctr"/>
+            <a:r>
+              <a:rPr sz="2000" b="0" i="0">
+                <a:solidFill>
+                  <a:srgbClr val="828282"/>
+                </a:solidFill>
+                <a:latin typeface="Arial"/>
+              </a:rPr>
+              <a:t>神のようだ</a:t>
+            </a:r>
+          </a:p>
+        </p:txBody>
+      </p:sp>
+      <p:sp>
+        <p:nvSpPr>
+          <p:cNvPr id="5" name="TextBox 4"/>
+          <p:cNvSpPr txBox="1"/>
+          <p:nvPr/>
+        </p:nvSpPr>
+        <p:spPr>
+          <a:xfrm>
+            <a:off x="640080" y="4494276"/>
+            <a:ext cx="10911535" cy="310896"/>
+          </a:xfrm>
+          <a:prstGeom prst="rect">
+            <a:avLst/>
+          </a:prstGeom>
+          <a:noFill/>
+        </p:spPr>
+        <p:txBody>
+          <a:bodyPr wrap="square">
+            <a:spAutoFit/>
+          </a:bodyPr>
+          <a:lstStyle/>
+          <a:p>
+            <a:pPr algn="ctr"/>
+            <a:r>
+              <a:rPr sz="2000" b="0" i="0">
+                <a:solidFill>
+                  <a:srgbClr val="828282"/>
+                </a:solidFill>
+                <a:latin typeface="Arial"/>
+              </a:rPr>
+              <a:t>暗闇の中で輝いた</a:t>
+            </a:r>
+          </a:p>
+        </p:txBody>
+      </p:sp>
     </p:spTree>
   </p:cSld>
   <p:clrMapOvr>
@@ -3449,6 +3589,76 @@
           </a:p>
         </p:txBody>
       </p:sp>
+      <p:sp>
+        <p:nvSpPr>
+          <p:cNvPr id="4" name="TextBox 3"/>
+          <p:cNvSpPr txBox="1"/>
+          <p:nvPr/>
+        </p:nvSpPr>
+        <p:spPr>
+          <a:xfrm>
+            <a:off x="640080" y="4128516"/>
+            <a:ext cx="10911535" cy="310896"/>
+          </a:xfrm>
+          <a:prstGeom prst="rect">
+            <a:avLst/>
+          </a:prstGeom>
+          <a:noFill/>
+        </p:spPr>
+        <p:txBody>
+          <a:bodyPr wrap="square">
+            <a:spAutoFit/>
+          </a:bodyPr>
+          <a:lstStyle/>
+          <a:p>
+            <a:pPr algn="ctr"/>
+            <a:r>
+              <a:rPr sz="2000" b="0" i="0">
+                <a:solidFill>
+                  <a:srgbClr val="828282"/>
+                </a:solidFill>
+                <a:latin typeface="Arial"/>
+              </a:rPr>
+              <a:t>灰から私たちをよみがえらせた</a:t>
+            </a:r>
+          </a:p>
+        </p:txBody>
+      </p:sp>
+      <p:sp>
+        <p:nvSpPr>
+          <p:cNvPr id="5" name="TextBox 4"/>
+          <p:cNvSpPr txBox="1"/>
+          <p:nvPr/>
+        </p:nvSpPr>
+        <p:spPr>
+          <a:xfrm>
+            <a:off x="640080" y="4494276"/>
+            <a:ext cx="10911535" cy="310896"/>
+          </a:xfrm>
+          <a:prstGeom prst="rect">
+            <a:avLst/>
+          </a:prstGeom>
+          <a:noFill/>
+        </p:spPr>
+        <p:txBody>
+          <a:bodyPr wrap="square">
+            <a:spAutoFit/>
+          </a:bodyPr>
+          <a:lstStyle/>
+          <a:p>
+            <a:pPr algn="ctr"/>
+            <a:r>
+              <a:rPr sz="2000" b="0" i="0">
+                <a:solidFill>
+                  <a:srgbClr val="828282"/>
+                </a:solidFill>
+                <a:latin typeface="Arial"/>
+              </a:rPr>
+              <a:t>他に等しいものはない</a:t>
+            </a:r>
+          </a:p>
+        </p:txBody>
+      </p:sp>
     </p:spTree>
   </p:cSld>
   <p:clrMapOvr>
@@ -3545,6 +3755,76 @@
           </a:p>
         </p:txBody>
       </p:sp>
+      <p:sp>
+        <p:nvSpPr>
+          <p:cNvPr id="4" name="TextBox 3"/>
+          <p:cNvSpPr txBox="1"/>
+          <p:nvPr/>
+        </p:nvSpPr>
+        <p:spPr>
+          <a:xfrm>
+            <a:off x="640080" y="4128516"/>
+            <a:ext cx="10911535" cy="310896"/>
+          </a:xfrm>
+          <a:prstGeom prst="rect">
+            <a:avLst/>
+          </a:prstGeom>
+          <a:noFill/>
+        </p:spPr>
+        <p:txBody>
+          <a:bodyPr wrap="square">
+            <a:spAutoFit/>
+          </a:bodyPr>
+          <a:lstStyle/>
+          <a:p>
+            <a:pPr algn="ctr"/>
+            <a:r>
+              <a:rPr sz="2000" b="0" i="0">
+                <a:solidFill>
+                  <a:srgbClr val="828282"/>
+                </a:solidFill>
+                <a:latin typeface="Arial"/>
+              </a:rPr>
+              <a:t>私たちの神はすべての者より高い</a:t>
+            </a:r>
+          </a:p>
+        </p:txBody>
+      </p:sp>
+      <p:sp>
+        <p:nvSpPr>
+          <p:cNvPr id="5" name="TextBox 4"/>
+          <p:cNvSpPr txBox="1"/>
+          <p:nvPr/>
+        </p:nvSpPr>
+        <p:spPr>
+          <a:xfrm>
+            <a:off x="640080" y="4494276"/>
+            <a:ext cx="10911535" cy="310896"/>
+          </a:xfrm>
+          <a:prstGeom prst="rect">
+            <a:avLst/>
+          </a:prstGeom>
+          <a:noFill/>
+        </p:spPr>
+        <p:txBody>
+          <a:bodyPr wrap="square">
+            <a:spAutoFit/>
+          </a:bodyPr>
+          <a:lstStyle/>
+          <a:p>
+            <a:pPr algn="ctr"/>
+            <a:r>
+              <a:rPr sz="2000" b="0" i="0">
+                <a:solidFill>
+                  <a:srgbClr val="828282"/>
+                </a:solidFill>
+                <a:latin typeface="Arial"/>
+              </a:rPr>
+              <a:t>私たちの神は癒し主</a:t>
+            </a:r>
+          </a:p>
+        </p:txBody>
+      </p:sp>
     </p:spTree>
   </p:cSld>
   <p:clrMapOvr>
@@ -3641,6 +3921,76 @@
           </a:p>
         </p:txBody>
       </p:sp>
+      <p:sp>
+        <p:nvSpPr>
+          <p:cNvPr id="4" name="TextBox 3"/>
+          <p:cNvSpPr txBox="1"/>
+          <p:nvPr/>
+        </p:nvSpPr>
+        <p:spPr>
+          <a:xfrm>
+            <a:off x="640080" y="4128516"/>
+            <a:ext cx="10911535" cy="310896"/>
+          </a:xfrm>
+          <a:prstGeom prst="rect">
+            <a:avLst/>
+          </a:prstGeom>
+          <a:noFill/>
+        </p:spPr>
+        <p:txBody>
+          <a:bodyPr wrap="square">
+            <a:spAutoFit/>
+          </a:bodyPr>
+          <a:lstStyle/>
+          <a:p>
+            <a:pPr algn="ctr"/>
+            <a:r>
+              <a:rPr sz="2000" b="0" i="0">
+                <a:solidFill>
+                  <a:srgbClr val="828282"/>
+                </a:solidFill>
+                <a:latin typeface="Arial"/>
+              </a:rPr>
+              <a:t>全能の</a:t>
+            </a:r>
+          </a:p>
+        </p:txBody>
+      </p:sp>
+      <p:sp>
+        <p:nvSpPr>
+          <p:cNvPr id="5" name="TextBox 4"/>
+          <p:cNvSpPr txBox="1"/>
+          <p:nvPr/>
+        </p:nvSpPr>
+        <p:spPr>
+          <a:xfrm>
+            <a:off x="640080" y="4494276"/>
+            <a:ext cx="10911535" cy="310896"/>
+          </a:xfrm>
+          <a:prstGeom prst="rect">
+            <a:avLst/>
+          </a:prstGeom>
+          <a:noFill/>
+        </p:spPr>
+        <p:txBody>
+          <a:bodyPr wrap="square">
+            <a:spAutoFit/>
+          </a:bodyPr>
+          <a:lstStyle/>
+          <a:p>
+            <a:pPr algn="ctr"/>
+            <a:r>
+              <a:rPr sz="2000" b="0" i="0">
+                <a:solidFill>
+                  <a:srgbClr val="828282"/>
+                </a:solidFill>
+                <a:latin typeface="Arial"/>
+              </a:rPr>
+              <a:t>私たちの神よ、私たちの神よ</a:t>
+            </a:r>
+          </a:p>
+        </p:txBody>
+      </p:sp>
     </p:spTree>
   </p:cSld>
   <p:clrMapOvr>
@@ -4104,6 +4454,41 @@
           </a:p>
         </p:txBody>
       </p:sp>
+      <p:sp>
+        <p:nvSpPr>
+          <p:cNvPr id="5" name="TextBox 4"/>
+          <p:cNvSpPr txBox="1"/>
+          <p:nvPr/>
+        </p:nvSpPr>
+        <p:spPr>
+          <a:xfrm>
+            <a:off x="640080" y="4494276"/>
+            <a:ext cx="10911535" cy="310896"/>
+          </a:xfrm>
+          <a:prstGeom prst="rect">
+            <a:avLst/>
+          </a:prstGeom>
+          <a:noFill/>
+        </p:spPr>
+        <p:txBody>
+          <a:bodyPr wrap="square">
+            <a:spAutoFit/>
+          </a:bodyPr>
+          <a:lstStyle/>
+          <a:p>
+            <a:pPr algn="ctr"/>
+            <a:r>
+              <a:rPr sz="2000" b="0" i="0">
+                <a:solidFill>
+                  <a:srgbClr val="828282"/>
+                </a:solidFill>
+                <a:latin typeface="Arial"/>
+              </a:rPr>
+              <a:t>力において偉大</a:t>
+            </a:r>
+          </a:p>
+        </p:txBody>
+      </p:sp>
     </p:spTree>
   </p:cSld>
   <p:clrMapOvr>
@@ -4200,6 +4585,76 @@
           </a:p>
         </p:txBody>
       </p:sp>
+      <p:sp>
+        <p:nvSpPr>
+          <p:cNvPr id="4" name="TextBox 3"/>
+          <p:cNvSpPr txBox="1"/>
+          <p:nvPr/>
+        </p:nvSpPr>
+        <p:spPr>
+          <a:xfrm>
+            <a:off x="640080" y="4128516"/>
+            <a:ext cx="10911535" cy="310896"/>
+          </a:xfrm>
+          <a:prstGeom prst="rect">
+            <a:avLst/>
+          </a:prstGeom>
+          <a:noFill/>
+        </p:spPr>
+        <p:txBody>
+          <a:bodyPr wrap="square">
+            <a:spAutoFit/>
+          </a:bodyPr>
+          <a:lstStyle/>
+          <a:p>
+            <a:pPr algn="ctr"/>
+            <a:r>
+              <a:rPr sz="2000" b="0" i="0">
+                <a:solidFill>
+                  <a:srgbClr val="828282"/>
+                </a:solidFill>
+                <a:latin typeface="Arial"/>
+              </a:rPr>
+              <a:t>私たちの神</a:t>
+            </a:r>
+          </a:p>
+        </p:txBody>
+      </p:sp>
+      <p:sp>
+        <p:nvSpPr>
+          <p:cNvPr id="5" name="TextBox 4"/>
+          <p:cNvSpPr txBox="1"/>
+          <p:nvPr/>
+        </p:nvSpPr>
+        <p:spPr>
+          <a:xfrm>
+            <a:off x="640080" y="4494276"/>
+            <a:ext cx="10911535" cy="310896"/>
+          </a:xfrm>
+          <a:prstGeom prst="rect">
+            <a:avLst/>
+          </a:prstGeom>
+          <a:noFill/>
+        </p:spPr>
+        <p:txBody>
+          <a:bodyPr wrap="square">
+            <a:spAutoFit/>
+          </a:bodyPr>
+          <a:lstStyle/>
+          <a:p>
+            <a:pPr algn="ctr"/>
+            <a:r>
+              <a:rPr sz="2000" b="0" i="0">
+                <a:solidFill>
+                  <a:srgbClr val="828282"/>
+                </a:solidFill>
+                <a:latin typeface="Arial"/>
+              </a:rPr>
+              <a:t>私たちの神はより大きい</a:t>
+            </a:r>
+          </a:p>
+        </p:txBody>
+      </p:sp>
     </p:spTree>
   </p:cSld>
   <p:clrMapOvr>
@@ -4261,6 +4716,41 @@
           </a:p>
         </p:txBody>
       </p:sp>
+      <p:sp>
+        <p:nvSpPr>
+          <p:cNvPr id="3" name="TextBox 2"/>
+          <p:cNvSpPr txBox="1"/>
+          <p:nvPr/>
+        </p:nvSpPr>
+        <p:spPr>
+          <a:xfrm>
+            <a:off x="640080" y="3845052"/>
+            <a:ext cx="10911535" cy="310896"/>
+          </a:xfrm>
+          <a:prstGeom prst="rect">
+            <a:avLst/>
+          </a:prstGeom>
+          <a:noFill/>
+        </p:spPr>
+        <p:txBody>
+          <a:bodyPr wrap="square">
+            <a:spAutoFit/>
+          </a:bodyPr>
+          <a:lstStyle/>
+          <a:p>
+            <a:pPr algn="ctr"/>
+            <a:r>
+              <a:rPr sz="2000" b="0" i="0">
+                <a:solidFill>
+                  <a:srgbClr val="828282"/>
+                </a:solidFill>
+                <a:latin typeface="Arial"/>
+              </a:rPr>
+              <a:t>私たちの神はより強い</a:t>
+            </a:r>
+          </a:p>
+        </p:txBody>
+      </p:sp>
     </p:spTree>
   </p:cSld>
   <p:clrMapOvr>
@@ -4357,6 +4847,76 @@
           </a:p>
         </p:txBody>
       </p:sp>
+      <p:sp>
+        <p:nvSpPr>
+          <p:cNvPr id="4" name="TextBox 3"/>
+          <p:cNvSpPr txBox="1"/>
+          <p:nvPr/>
+        </p:nvSpPr>
+        <p:spPr>
+          <a:xfrm>
+            <a:off x="640080" y="4128516"/>
+            <a:ext cx="10911535" cy="310896"/>
+          </a:xfrm>
+          <a:prstGeom prst="rect">
+            <a:avLst/>
+          </a:prstGeom>
+          <a:noFill/>
+        </p:spPr>
+        <p:txBody>
+          <a:bodyPr wrap="square">
+            <a:spAutoFit/>
+          </a:bodyPr>
+          <a:lstStyle/>
+          <a:p>
+            <a:pPr algn="ctr"/>
+            <a:r>
+              <a:rPr sz="2000" b="0" i="0">
+                <a:solidFill>
+                  <a:srgbClr val="828282"/>
+                </a:solidFill>
+                <a:latin typeface="Arial"/>
+              </a:rPr>
+              <a:t>神のようだ</a:t>
+            </a:r>
+          </a:p>
+        </p:txBody>
+      </p:sp>
+      <p:sp>
+        <p:nvSpPr>
+          <p:cNvPr id="5" name="TextBox 4"/>
+          <p:cNvSpPr txBox="1"/>
+          <p:nvPr/>
+        </p:nvSpPr>
+        <p:spPr>
+          <a:xfrm>
+            <a:off x="640080" y="4494276"/>
+            <a:ext cx="10911535" cy="310896"/>
+          </a:xfrm>
+          <a:prstGeom prst="rect">
+            <a:avLst/>
+          </a:prstGeom>
+          <a:noFill/>
+        </p:spPr>
+        <p:txBody>
+          <a:bodyPr wrap="square">
+            <a:spAutoFit/>
+          </a:bodyPr>
+          <a:lstStyle/>
+          <a:p>
+            <a:pPr algn="ctr"/>
+            <a:r>
+              <a:rPr sz="2000" b="0" i="0">
+                <a:solidFill>
+                  <a:srgbClr val="828282"/>
+                </a:solidFill>
+                <a:latin typeface="Arial"/>
+              </a:rPr>
+              <a:t>暗闇の中で輝いた</a:t>
+            </a:r>
+          </a:p>
+        </p:txBody>
+      </p:sp>
     </p:spTree>
   </p:cSld>
   <p:clrMapOvr>
@@ -4523,6 +5083,76 @@
           </a:p>
         </p:txBody>
       </p:sp>
+      <p:sp>
+        <p:nvSpPr>
+          <p:cNvPr id="6" name="TextBox 5"/>
+          <p:cNvSpPr txBox="1"/>
+          <p:nvPr/>
+        </p:nvSpPr>
+        <p:spPr>
+          <a:xfrm>
+            <a:off x="640080" y="4530852"/>
+            <a:ext cx="10911535" cy="310896"/>
+          </a:xfrm>
+          <a:prstGeom prst="rect">
+            <a:avLst/>
+          </a:prstGeom>
+          <a:noFill/>
+        </p:spPr>
+        <p:txBody>
+          <a:bodyPr wrap="square">
+            <a:spAutoFit/>
+          </a:bodyPr>
+          <a:lstStyle/>
+          <a:p>
+            <a:pPr algn="ctr"/>
+            <a:r>
+              <a:rPr sz="2000" b="0" i="1">
+                <a:solidFill>
+                  <a:srgbClr val="828282"/>
+                </a:solidFill>
+                <a:latin typeface="Arial"/>
+              </a:rPr>
+              <a:t>Ao Senhor que derrama esperança na escuridão</a:t>
+            </a:r>
+          </a:p>
+        </p:txBody>
+      </p:sp>
+      <p:sp>
+        <p:nvSpPr>
+          <p:cNvPr id="7" name="TextBox 6"/>
+          <p:cNvSpPr txBox="1"/>
+          <p:nvPr/>
+        </p:nvSpPr>
+        <p:spPr>
+          <a:xfrm>
+            <a:off x="640080" y="4896612"/>
+            <a:ext cx="10911535" cy="310896"/>
+          </a:xfrm>
+          <a:prstGeom prst="rect">
+            <a:avLst/>
+          </a:prstGeom>
+          <a:noFill/>
+        </p:spPr>
+        <p:txBody>
+          <a:bodyPr wrap="square">
+            <a:spAutoFit/>
+          </a:bodyPr>
+          <a:lstStyle/>
+          <a:p>
+            <a:pPr algn="ctr"/>
+            <a:r>
+              <a:rPr sz="2000" b="0" i="1">
+                <a:solidFill>
+                  <a:srgbClr val="828282"/>
+                </a:solidFill>
+                <a:latin typeface="Arial"/>
+              </a:rPr>
+              <a:t>Ninguém se compara</a:t>
+            </a:r>
+          </a:p>
+        </p:txBody>
+      </p:sp>
     </p:spTree>
   </p:cSld>
   <p:clrMapOvr>
@@ -4619,6 +5249,76 @@
           </a:p>
         </p:txBody>
       </p:sp>
+      <p:sp>
+        <p:nvSpPr>
+          <p:cNvPr id="4" name="TextBox 3"/>
+          <p:cNvSpPr txBox="1"/>
+          <p:nvPr/>
+        </p:nvSpPr>
+        <p:spPr>
+          <a:xfrm>
+            <a:off x="640080" y="4128516"/>
+            <a:ext cx="10911535" cy="310896"/>
+          </a:xfrm>
+          <a:prstGeom prst="rect">
+            <a:avLst/>
+          </a:prstGeom>
+          <a:noFill/>
+        </p:spPr>
+        <p:txBody>
+          <a:bodyPr wrap="square">
+            <a:spAutoFit/>
+          </a:bodyPr>
+          <a:lstStyle/>
+          <a:p>
+            <a:pPr algn="ctr"/>
+            <a:r>
+              <a:rPr sz="2000" b="0" i="0">
+                <a:solidFill>
+                  <a:srgbClr val="828282"/>
+                </a:solidFill>
+                <a:latin typeface="Arial"/>
+              </a:rPr>
+              <a:t>灰から私たちをよみがえらせた</a:t>
+            </a:r>
+          </a:p>
+        </p:txBody>
+      </p:sp>
+      <p:sp>
+        <p:nvSpPr>
+          <p:cNvPr id="5" name="TextBox 4"/>
+          <p:cNvSpPr txBox="1"/>
+          <p:nvPr/>
+        </p:nvSpPr>
+        <p:spPr>
+          <a:xfrm>
+            <a:off x="640080" y="4494276"/>
+            <a:ext cx="10911535" cy="310896"/>
+          </a:xfrm>
+          <a:prstGeom prst="rect">
+            <a:avLst/>
+          </a:prstGeom>
+          <a:noFill/>
+        </p:spPr>
+        <p:txBody>
+          <a:bodyPr wrap="square">
+            <a:spAutoFit/>
+          </a:bodyPr>
+          <a:lstStyle/>
+          <a:p>
+            <a:pPr algn="ctr"/>
+            <a:r>
+              <a:rPr sz="2000" b="0" i="0">
+                <a:solidFill>
+                  <a:srgbClr val="828282"/>
+                </a:solidFill>
+                <a:latin typeface="Arial"/>
+              </a:rPr>
+              <a:t>他に等しいものはない</a:t>
+            </a:r>
+          </a:p>
+        </p:txBody>
+      </p:sp>
     </p:spTree>
   </p:cSld>
   <p:clrMapOvr>
@@ -4715,6 +5415,76 @@
           </a:p>
         </p:txBody>
       </p:sp>
+      <p:sp>
+        <p:nvSpPr>
+          <p:cNvPr id="4" name="TextBox 3"/>
+          <p:cNvSpPr txBox="1"/>
+          <p:nvPr/>
+        </p:nvSpPr>
+        <p:spPr>
+          <a:xfrm>
+            <a:off x="640080" y="4128516"/>
+            <a:ext cx="10911535" cy="310896"/>
+          </a:xfrm>
+          <a:prstGeom prst="rect">
+            <a:avLst/>
+          </a:prstGeom>
+          <a:noFill/>
+        </p:spPr>
+        <p:txBody>
+          <a:bodyPr wrap="square">
+            <a:spAutoFit/>
+          </a:bodyPr>
+          <a:lstStyle/>
+          <a:p>
+            <a:pPr algn="ctr"/>
+            <a:r>
+              <a:rPr sz="2000" b="0" i="0">
+                <a:solidFill>
+                  <a:srgbClr val="828282"/>
+                </a:solidFill>
+                <a:latin typeface="Arial"/>
+              </a:rPr>
+              <a:t>私たちの神はすべての者より高い</a:t>
+            </a:r>
+          </a:p>
+        </p:txBody>
+      </p:sp>
+      <p:sp>
+        <p:nvSpPr>
+          <p:cNvPr id="5" name="TextBox 4"/>
+          <p:cNvSpPr txBox="1"/>
+          <p:nvPr/>
+        </p:nvSpPr>
+        <p:spPr>
+          <a:xfrm>
+            <a:off x="640080" y="4494276"/>
+            <a:ext cx="10911535" cy="310896"/>
+          </a:xfrm>
+          <a:prstGeom prst="rect">
+            <a:avLst/>
+          </a:prstGeom>
+          <a:noFill/>
+        </p:spPr>
+        <p:txBody>
+          <a:bodyPr wrap="square">
+            <a:spAutoFit/>
+          </a:bodyPr>
+          <a:lstStyle/>
+          <a:p>
+            <a:pPr algn="ctr"/>
+            <a:r>
+              <a:rPr sz="2000" b="0" i="0">
+                <a:solidFill>
+                  <a:srgbClr val="828282"/>
+                </a:solidFill>
+                <a:latin typeface="Arial"/>
+              </a:rPr>
+              <a:t>私たちの神は癒し主</a:t>
+            </a:r>
+          </a:p>
+        </p:txBody>
+      </p:sp>
     </p:spTree>
   </p:cSld>
   <p:clrMapOvr>
@@ -4811,6 +5581,76 @@
           </a:p>
         </p:txBody>
       </p:sp>
+      <p:sp>
+        <p:nvSpPr>
+          <p:cNvPr id="4" name="TextBox 3"/>
+          <p:cNvSpPr txBox="1"/>
+          <p:nvPr/>
+        </p:nvSpPr>
+        <p:spPr>
+          <a:xfrm>
+            <a:off x="640080" y="4128516"/>
+            <a:ext cx="10911535" cy="310896"/>
+          </a:xfrm>
+          <a:prstGeom prst="rect">
+            <a:avLst/>
+          </a:prstGeom>
+          <a:noFill/>
+        </p:spPr>
+        <p:txBody>
+          <a:bodyPr wrap="square">
+            <a:spAutoFit/>
+          </a:bodyPr>
+          <a:lstStyle/>
+          <a:p>
+            <a:pPr algn="ctr"/>
+            <a:r>
+              <a:rPr sz="2000" b="0" i="0">
+                <a:solidFill>
+                  <a:srgbClr val="828282"/>
+                </a:solidFill>
+                <a:latin typeface="Arial"/>
+              </a:rPr>
+              <a:t>全能の</a:t>
+            </a:r>
+          </a:p>
+        </p:txBody>
+      </p:sp>
+      <p:sp>
+        <p:nvSpPr>
+          <p:cNvPr id="5" name="TextBox 4"/>
+          <p:cNvSpPr txBox="1"/>
+          <p:nvPr/>
+        </p:nvSpPr>
+        <p:spPr>
+          <a:xfrm>
+            <a:off x="640080" y="4494276"/>
+            <a:ext cx="10911535" cy="310896"/>
+          </a:xfrm>
+          <a:prstGeom prst="rect">
+            <a:avLst/>
+          </a:prstGeom>
+          <a:noFill/>
+        </p:spPr>
+        <p:txBody>
+          <a:bodyPr wrap="square">
+            <a:spAutoFit/>
+          </a:bodyPr>
+          <a:lstStyle/>
+          <a:p>
+            <a:pPr algn="ctr"/>
+            <a:r>
+              <a:rPr sz="2000" b="0" i="0">
+                <a:solidFill>
+                  <a:srgbClr val="828282"/>
+                </a:solidFill>
+                <a:latin typeface="Arial"/>
+              </a:rPr>
+              <a:t>私たちの神よ、私たちの神よ</a:t>
+            </a:r>
+          </a:p>
+        </p:txBody>
+      </p:sp>
     </p:spTree>
   </p:cSld>
   <p:clrMapOvr>
@@ -4907,6 +5747,76 @@
           </a:p>
         </p:txBody>
       </p:sp>
+      <p:sp>
+        <p:nvSpPr>
+          <p:cNvPr id="4" name="TextBox 3"/>
+          <p:cNvSpPr txBox="1"/>
+          <p:nvPr/>
+        </p:nvSpPr>
+        <p:spPr>
+          <a:xfrm>
+            <a:off x="640080" y="4128516"/>
+            <a:ext cx="10911535" cy="310896"/>
+          </a:xfrm>
+          <a:prstGeom prst="rect">
+            <a:avLst/>
+          </a:prstGeom>
+          <a:noFill/>
+        </p:spPr>
+        <p:txBody>
+          <a:bodyPr wrap="square">
+            <a:spAutoFit/>
+          </a:bodyPr>
+          <a:lstStyle/>
+          <a:p>
+            <a:pPr algn="ctr"/>
+            <a:r>
+              <a:rPr sz="2000" b="0" i="0">
+                <a:solidFill>
+                  <a:srgbClr val="828282"/>
+                </a:solidFill>
+                <a:latin typeface="Arial"/>
+              </a:rPr>
+              <a:t>神のようだ</a:t>
+            </a:r>
+          </a:p>
+        </p:txBody>
+      </p:sp>
+      <p:sp>
+        <p:nvSpPr>
+          <p:cNvPr id="5" name="TextBox 4"/>
+          <p:cNvSpPr txBox="1"/>
+          <p:nvPr/>
+        </p:nvSpPr>
+        <p:spPr>
+          <a:xfrm>
+            <a:off x="640080" y="4494276"/>
+            <a:ext cx="10911535" cy="310896"/>
+          </a:xfrm>
+          <a:prstGeom prst="rect">
+            <a:avLst/>
+          </a:prstGeom>
+          <a:noFill/>
+        </p:spPr>
+        <p:txBody>
+          <a:bodyPr wrap="square">
+            <a:spAutoFit/>
+          </a:bodyPr>
+          <a:lstStyle/>
+          <a:p>
+            <a:pPr algn="ctr"/>
+            <a:r>
+              <a:rPr sz="2000" b="0" i="0">
+                <a:solidFill>
+                  <a:srgbClr val="828282"/>
+                </a:solidFill>
+                <a:latin typeface="Arial"/>
+              </a:rPr>
+              <a:t>暗闇の中で輝いた</a:t>
+            </a:r>
+          </a:p>
+        </p:txBody>
+      </p:sp>
     </p:spTree>
   </p:cSld>
   <p:clrMapOvr>
@@ -5003,6 +5913,76 @@
           </a:p>
         </p:txBody>
       </p:sp>
+      <p:sp>
+        <p:nvSpPr>
+          <p:cNvPr id="4" name="TextBox 3"/>
+          <p:cNvSpPr txBox="1"/>
+          <p:nvPr/>
+        </p:nvSpPr>
+        <p:spPr>
+          <a:xfrm>
+            <a:off x="640080" y="4128516"/>
+            <a:ext cx="10911535" cy="310896"/>
+          </a:xfrm>
+          <a:prstGeom prst="rect">
+            <a:avLst/>
+          </a:prstGeom>
+          <a:noFill/>
+        </p:spPr>
+        <p:txBody>
+          <a:bodyPr wrap="square">
+            <a:spAutoFit/>
+          </a:bodyPr>
+          <a:lstStyle/>
+          <a:p>
+            <a:pPr algn="ctr"/>
+            <a:r>
+              <a:rPr sz="2000" b="0" i="0">
+                <a:solidFill>
+                  <a:srgbClr val="828282"/>
+                </a:solidFill>
+                <a:latin typeface="Arial"/>
+              </a:rPr>
+              <a:t>灰から私たちをよみがえらせた</a:t>
+            </a:r>
+          </a:p>
+        </p:txBody>
+      </p:sp>
+      <p:sp>
+        <p:nvSpPr>
+          <p:cNvPr id="5" name="TextBox 4"/>
+          <p:cNvSpPr txBox="1"/>
+          <p:nvPr/>
+        </p:nvSpPr>
+        <p:spPr>
+          <a:xfrm>
+            <a:off x="640080" y="4494276"/>
+            <a:ext cx="10911535" cy="310896"/>
+          </a:xfrm>
+          <a:prstGeom prst="rect">
+            <a:avLst/>
+          </a:prstGeom>
+          <a:noFill/>
+        </p:spPr>
+        <p:txBody>
+          <a:bodyPr wrap="square">
+            <a:spAutoFit/>
+          </a:bodyPr>
+          <a:lstStyle/>
+          <a:p>
+            <a:pPr algn="ctr"/>
+            <a:r>
+              <a:rPr sz="2000" b="0" i="0">
+                <a:solidFill>
+                  <a:srgbClr val="828282"/>
+                </a:solidFill>
+                <a:latin typeface="Arial"/>
+              </a:rPr>
+              <a:t>他に等しいものはない</a:t>
+            </a:r>
+          </a:p>
+        </p:txBody>
+      </p:sp>
     </p:spTree>
   </p:cSld>
   <p:clrMapOvr>
@@ -5099,6 +6079,76 @@
           </a:p>
         </p:txBody>
       </p:sp>
+      <p:sp>
+        <p:nvSpPr>
+          <p:cNvPr id="4" name="TextBox 3"/>
+          <p:cNvSpPr txBox="1"/>
+          <p:nvPr/>
+        </p:nvSpPr>
+        <p:spPr>
+          <a:xfrm>
+            <a:off x="640080" y="4128516"/>
+            <a:ext cx="10911535" cy="310896"/>
+          </a:xfrm>
+          <a:prstGeom prst="rect">
+            <a:avLst/>
+          </a:prstGeom>
+          <a:noFill/>
+        </p:spPr>
+        <p:txBody>
+          <a:bodyPr wrap="square">
+            <a:spAutoFit/>
+          </a:bodyPr>
+          <a:lstStyle/>
+          <a:p>
+            <a:pPr algn="ctr"/>
+            <a:r>
+              <a:rPr sz="2000" b="0" i="0">
+                <a:solidFill>
+                  <a:srgbClr val="828282"/>
+                </a:solidFill>
+                <a:latin typeface="Arial"/>
+              </a:rPr>
+              <a:t>私たちの神はすべての者より高い</a:t>
+            </a:r>
+          </a:p>
+        </p:txBody>
+      </p:sp>
+      <p:sp>
+        <p:nvSpPr>
+          <p:cNvPr id="5" name="TextBox 4"/>
+          <p:cNvSpPr txBox="1"/>
+          <p:nvPr/>
+        </p:nvSpPr>
+        <p:spPr>
+          <a:xfrm>
+            <a:off x="640080" y="4494276"/>
+            <a:ext cx="10911535" cy="310896"/>
+          </a:xfrm>
+          <a:prstGeom prst="rect">
+            <a:avLst/>
+          </a:prstGeom>
+          <a:noFill/>
+        </p:spPr>
+        <p:txBody>
+          <a:bodyPr wrap="square">
+            <a:spAutoFit/>
+          </a:bodyPr>
+          <a:lstStyle/>
+          <a:p>
+            <a:pPr algn="ctr"/>
+            <a:r>
+              <a:rPr sz="2000" b="0" i="0">
+                <a:solidFill>
+                  <a:srgbClr val="828282"/>
+                </a:solidFill>
+                <a:latin typeface="Arial"/>
+              </a:rPr>
+              <a:t>私たちの神は癒し主</a:t>
+            </a:r>
+          </a:p>
+        </p:txBody>
+      </p:sp>
     </p:spTree>
   </p:cSld>
   <p:clrMapOvr>
@@ -5191,6 +6241,76 @@
                 <a:latin typeface="Arial"/>
               </a:rPr>
               <a:t>Nosso Deus, Nosso Deus</a:t>
+            </a:r>
+          </a:p>
+        </p:txBody>
+      </p:sp>
+      <p:sp>
+        <p:nvSpPr>
+          <p:cNvPr id="4" name="TextBox 3"/>
+          <p:cNvSpPr txBox="1"/>
+          <p:nvPr/>
+        </p:nvSpPr>
+        <p:spPr>
+          <a:xfrm>
+            <a:off x="640080" y="4128516"/>
+            <a:ext cx="10911535" cy="310896"/>
+          </a:xfrm>
+          <a:prstGeom prst="rect">
+            <a:avLst/>
+          </a:prstGeom>
+          <a:noFill/>
+        </p:spPr>
+        <p:txBody>
+          <a:bodyPr wrap="square">
+            <a:spAutoFit/>
+          </a:bodyPr>
+          <a:lstStyle/>
+          <a:p>
+            <a:pPr algn="ctr"/>
+            <a:r>
+              <a:rPr sz="2000" b="0" i="0">
+                <a:solidFill>
+                  <a:srgbClr val="828282"/>
+                </a:solidFill>
+                <a:latin typeface="Arial"/>
+              </a:rPr>
+              <a:t>全能の</a:t>
+            </a:r>
+          </a:p>
+        </p:txBody>
+      </p:sp>
+      <p:sp>
+        <p:nvSpPr>
+          <p:cNvPr id="5" name="TextBox 4"/>
+          <p:cNvSpPr txBox="1"/>
+          <p:nvPr/>
+        </p:nvSpPr>
+        <p:spPr>
+          <a:xfrm>
+            <a:off x="640080" y="4494276"/>
+            <a:ext cx="10911535" cy="310896"/>
+          </a:xfrm>
+          <a:prstGeom prst="rect">
+            <a:avLst/>
+          </a:prstGeom>
+          <a:noFill/>
+        </p:spPr>
+        <p:txBody>
+          <a:bodyPr wrap="square">
+            <a:spAutoFit/>
+          </a:bodyPr>
+          <a:lstStyle/>
+          <a:p>
+            <a:pPr algn="ctr"/>
+            <a:r>
+              <a:rPr sz="2000" b="0" i="0">
+                <a:solidFill>
+                  <a:srgbClr val="828282"/>
+                </a:solidFill>
+                <a:latin typeface="Arial"/>
+              </a:rPr>
+              <a:t>私たちの神よ、私たちの神よ</a:t>
             </a:r>
           </a:p>
         </p:txBody>
